--- a/INCREMENTO3/Ppt/PPt Tercer incremento scrum++.pptx
+++ b/INCREMENTO3/Ppt/PPt Tercer incremento scrum++.pptx
@@ -12,11 +12,11 @@
     <p:sldId id="267" r:id="rId3"/>
     <p:sldId id="257" r:id="rId4"/>
     <p:sldId id="259" r:id="rId5"/>
-    <p:sldId id="273" r:id="rId6"/>
-    <p:sldId id="274" r:id="rId7"/>
-    <p:sldId id="261" r:id="rId8"/>
-    <p:sldId id="275" r:id="rId9"/>
-    <p:sldId id="277" r:id="rId10"/>
+    <p:sldId id="272" r:id="rId6"/>
+    <p:sldId id="273" r:id="rId7"/>
+    <p:sldId id="274" r:id="rId8"/>
+    <p:sldId id="261" r:id="rId9"/>
+    <p:sldId id="275" r:id="rId10"/>
     <p:sldId id="266" r:id="rId11"/>
     <p:sldId id="276" r:id="rId12"/>
   </p:sldIdLst>
@@ -218,7 +218,7 @@
           <a:p>
             <a:fld id="{56824AA8-F311-4ABC-8748-4A852C5A6ECD}" type="datetimeFigureOut">
               <a:rPr lang="es-419" smtClean="0"/>
-              <a:t>3/10/2025</a:t>
+              <a:t>24/10/2025</a:t>
             </a:fld>
             <a:endParaRPr lang="es-419"/>
           </a:p>
@@ -1364,7 +1364,7 @@
           <a:p>
             <a:fld id="{5BCAD085-E8A6-8845-BD4E-CB4CCA059FC4}" type="datetimeFigureOut">
               <a:rPr lang="en-US" smtClean="0"/>
-              <a:t>10/3/2025</a:t>
+              <a:t>10/24/2025</a:t>
             </a:fld>
             <a:endParaRPr lang="en-US"/>
           </a:p>
@@ -1615,7 +1615,7 @@
           <a:p>
             <a:fld id="{5BCAD085-E8A6-8845-BD4E-CB4CCA059FC4}" type="datetimeFigureOut">
               <a:rPr lang="en-US" smtClean="0"/>
-              <a:t>10/3/2025</a:t>
+              <a:t>10/24/2025</a:t>
             </a:fld>
             <a:endParaRPr lang="en-US"/>
           </a:p>
@@ -1929,7 +1929,7 @@
           <a:p>
             <a:fld id="{5BCAD085-E8A6-8845-BD4E-CB4CCA059FC4}" type="datetimeFigureOut">
               <a:rPr lang="en-US" smtClean="0"/>
-              <a:t>10/3/2025</a:t>
+              <a:t>10/24/2025</a:t>
             </a:fld>
             <a:endParaRPr lang="en-US"/>
           </a:p>
@@ -2262,7 +2262,7 @@
           <a:p>
             <a:fld id="{5BCAD085-E8A6-8845-BD4E-CB4CCA059FC4}" type="datetimeFigureOut">
               <a:rPr lang="en-US" smtClean="0"/>
-              <a:t>10/3/2025</a:t>
+              <a:t>10/24/2025</a:t>
             </a:fld>
             <a:endParaRPr lang="en-US"/>
           </a:p>
@@ -2576,7 +2576,7 @@
           <a:p>
             <a:fld id="{5BCAD085-E8A6-8845-BD4E-CB4CCA059FC4}" type="datetimeFigureOut">
               <a:rPr lang="en-US" smtClean="0"/>
-              <a:t>10/3/2025</a:t>
+              <a:t>10/24/2025</a:t>
             </a:fld>
             <a:endParaRPr lang="en-US"/>
           </a:p>
@@ -2969,7 +2969,7 @@
           <a:p>
             <a:fld id="{5BCAD085-E8A6-8845-BD4E-CB4CCA059FC4}" type="datetimeFigureOut">
               <a:rPr lang="en-US" smtClean="0"/>
-              <a:t>10/3/2025</a:t>
+              <a:t>10/24/2025</a:t>
             </a:fld>
             <a:endParaRPr lang="en-US"/>
           </a:p>
@@ -3139,7 +3139,7 @@
           <a:p>
             <a:fld id="{5BCAD085-E8A6-8845-BD4E-CB4CCA059FC4}" type="datetimeFigureOut">
               <a:rPr lang="en-US" smtClean="0"/>
-              <a:t>10/3/2025</a:t>
+              <a:t>10/24/2025</a:t>
             </a:fld>
             <a:endParaRPr lang="en-US"/>
           </a:p>
@@ -3319,7 +3319,7 @@
           <a:p>
             <a:fld id="{5BCAD085-E8A6-8845-BD4E-CB4CCA059FC4}" type="datetimeFigureOut">
               <a:rPr lang="en-US" smtClean="0"/>
-              <a:t>10/3/2025</a:t>
+              <a:t>10/24/2025</a:t>
             </a:fld>
             <a:endParaRPr lang="en-US"/>
           </a:p>
@@ -3489,7 +3489,7 @@
           <a:p>
             <a:fld id="{5BCAD085-E8A6-8845-BD4E-CB4CCA059FC4}" type="datetimeFigureOut">
               <a:rPr lang="en-US" smtClean="0"/>
-              <a:t>10/3/2025</a:t>
+              <a:t>10/24/2025</a:t>
             </a:fld>
             <a:endParaRPr lang="en-US"/>
           </a:p>
@@ -3736,7 +3736,7 @@
           <a:p>
             <a:fld id="{5BCAD085-E8A6-8845-BD4E-CB4CCA059FC4}" type="datetimeFigureOut">
               <a:rPr lang="en-US" smtClean="0"/>
-              <a:t>10/3/2025</a:t>
+              <a:t>10/24/2025</a:t>
             </a:fld>
             <a:endParaRPr lang="en-US"/>
           </a:p>
@@ -4033,7 +4033,7 @@
           <a:p>
             <a:fld id="{5BCAD085-E8A6-8845-BD4E-CB4CCA059FC4}" type="datetimeFigureOut">
               <a:rPr lang="en-US" smtClean="0"/>
-              <a:t>10/3/2025</a:t>
+              <a:t>10/24/2025</a:t>
             </a:fld>
             <a:endParaRPr lang="en-US"/>
           </a:p>
@@ -4412,7 +4412,7 @@
           <a:p>
             <a:fld id="{5BCAD085-E8A6-8845-BD4E-CB4CCA059FC4}" type="datetimeFigureOut">
               <a:rPr lang="en-US" smtClean="0"/>
-              <a:t>10/3/2025</a:t>
+              <a:t>10/24/2025</a:t>
             </a:fld>
             <a:endParaRPr lang="en-US"/>
           </a:p>
@@ -4535,7 +4535,7 @@
           <a:p>
             <a:fld id="{5BCAD085-E8A6-8845-BD4E-CB4CCA059FC4}" type="datetimeFigureOut">
               <a:rPr lang="en-US" smtClean="0"/>
-              <a:t>10/3/2025</a:t>
+              <a:t>10/24/2025</a:t>
             </a:fld>
             <a:endParaRPr lang="en-US"/>
           </a:p>
@@ -4630,7 +4630,7 @@
           <a:p>
             <a:fld id="{5BCAD085-E8A6-8845-BD4E-CB4CCA059FC4}" type="datetimeFigureOut">
               <a:rPr lang="en-US" smtClean="0"/>
-              <a:t>10/3/2025</a:t>
+              <a:t>10/24/2025</a:t>
             </a:fld>
             <a:endParaRPr lang="en-US"/>
           </a:p>
@@ -4885,7 +4885,7 @@
           <a:p>
             <a:fld id="{5BCAD085-E8A6-8845-BD4E-CB4CCA059FC4}" type="datetimeFigureOut">
               <a:rPr lang="en-US" smtClean="0"/>
-              <a:t>10/3/2025</a:t>
+              <a:t>10/24/2025</a:t>
             </a:fld>
             <a:endParaRPr lang="en-US"/>
           </a:p>
@@ -5148,7 +5148,7 @@
           <a:p>
             <a:fld id="{5BCAD085-E8A6-8845-BD4E-CB4CCA059FC4}" type="datetimeFigureOut">
               <a:rPr lang="en-US" smtClean="0"/>
-              <a:t>10/3/2025</a:t>
+              <a:t>10/24/2025</a:t>
             </a:fld>
             <a:endParaRPr lang="en-US"/>
           </a:p>
@@ -5962,7 +5962,7 @@
           <a:p>
             <a:fld id="{5BCAD085-E8A6-8845-BD4E-CB4CCA059FC4}" type="datetimeFigureOut">
               <a:rPr lang="en-US" smtClean="0"/>
-              <a:t>10/3/2025</a:t>
+              <a:t>10/24/2025</a:t>
             </a:fld>
             <a:endParaRPr lang="en-US"/>
           </a:p>
@@ -6496,12 +6496,7 @@
             <p:ph type="title"/>
           </p:nvPr>
         </p:nvSpPr>
-        <p:spPr>
-          <a:xfrm>
-            <a:off x="953016" y="1833952"/>
-            <a:ext cx="6347713" cy="1320800"/>
-          </a:xfrm>
-        </p:spPr>
+        <p:spPr/>
         <p:txBody>
           <a:bodyPr>
             <a:noAutofit/>
@@ -6510,14 +6505,14 @@
           <a:p>
             <a:pPr algn="ctr"/>
             <a:r>
-              <a:rPr lang="es-CL" sz="2400" b="1" dirty="0">
-                <a:latin typeface="Trebuchet MS (Títulos)"/>
+              <a:rPr lang="es-CL" sz="2000" b="1" dirty="0">
+                <a:latin typeface="Times New Roman" panose="02020603050405020304" pitchFamily="18" charset="0"/>
                 <a:cs typeface="Times New Roman" panose="02020603050405020304" pitchFamily="18" charset="0"/>
               </a:rPr>
               <a:t>PROYECTO INGENIERÍA DE SOFTWARE SEGUNDO INCREMENTO PARA EL SISTEMA BIOMÉTRICO WEB EUGCOM</a:t>
             </a:r>
-            <a:endParaRPr lang="es-CL" sz="2400" dirty="0">
-              <a:latin typeface="Trebuchet MS (Títulos)"/>
+            <a:endParaRPr lang="es-CL" sz="2000" dirty="0">
+              <a:latin typeface="Times New Roman" panose="02020603050405020304" pitchFamily="18" charset="0"/>
               <a:cs typeface="Times New Roman" panose="02020603050405020304" pitchFamily="18" charset="0"/>
             </a:endParaRPr>
           </a:p>
@@ -6535,17 +6530,17 @@
         </p:nvSpPr>
         <p:spPr>
           <a:xfrm>
-            <a:off x="816233" y="3225120"/>
-            <a:ext cx="6347714" cy="3448484"/>
+            <a:off x="816232" y="2905271"/>
+            <a:ext cx="6347714" cy="3880773"/>
           </a:xfrm>
         </p:spPr>
         <p:txBody>
           <a:bodyPr>
-            <a:normAutofit fontScale="92500" lnSpcReduction="10000"/>
+            <a:normAutofit/>
           </a:bodyPr>
           <a:lstStyle/>
           <a:p>
-            <a:pPr marL="0" indent="0" algn="ctr">
+            <a:pPr marL="0" indent="0">
               <a:buNone/>
             </a:pPr>
             <a:r>
@@ -6557,7 +6552,7 @@
             </a:r>
           </a:p>
           <a:p>
-            <a:pPr marL="0" indent="0" algn="ctr">
+            <a:pPr marL="0" indent="0">
               <a:buNone/>
             </a:pPr>
             <a:r>
@@ -6569,7 +6564,7 @@
             </a:r>
           </a:p>
           <a:p>
-            <a:pPr marL="0" indent="0" algn="ctr">
+            <a:pPr marL="0" indent="0">
               <a:buNone/>
             </a:pPr>
             <a:r>
@@ -6581,7 +6576,7 @@
             </a:r>
           </a:p>
           <a:p>
-            <a:pPr marL="0" indent="0" algn="ctr">
+            <a:pPr marL="0" indent="0">
               <a:buNone/>
             </a:pPr>
             <a:r>
@@ -6593,7 +6588,7 @@
             </a:r>
           </a:p>
           <a:p>
-            <a:pPr marL="0" indent="0" algn="ctr">
+            <a:pPr marL="0" indent="0">
               <a:buNone/>
             </a:pPr>
             <a:r>
@@ -6605,7 +6600,7 @@
             </a:r>
           </a:p>
           <a:p>
-            <a:pPr marL="0" indent="0" algn="ctr">
+            <a:pPr marL="0" indent="0">
               <a:buNone/>
             </a:pPr>
             <a:r>
@@ -6617,7 +6612,7 @@
             </a:r>
           </a:p>
           <a:p>
-            <a:pPr marL="0" indent="0" algn="ctr">
+            <a:pPr marL="0" indent="0">
               <a:buNone/>
             </a:pPr>
             <a:r>
@@ -6629,7 +6624,7 @@
             </a:r>
           </a:p>
           <a:p>
-            <a:pPr marL="0" indent="0" algn="ctr">
+            <a:pPr marL="0" indent="0">
               <a:buNone/>
             </a:pPr>
             <a:endParaRPr lang="es-CL" sz="1100" dirty="0">
@@ -6638,7 +6633,7 @@
             </a:endParaRPr>
           </a:p>
           <a:p>
-            <a:pPr marL="0" indent="0" algn="ctr">
+            <a:pPr marL="0" indent="0">
               <a:buNone/>
             </a:pPr>
             <a:r>
@@ -6661,7 +6656,7 @@
             </a:endParaRPr>
           </a:p>
           <a:p>
-            <a:pPr marL="0" indent="0" algn="ctr">
+            <a:pPr marL="0" indent="0">
               <a:buNone/>
             </a:pPr>
             <a:r>
@@ -6687,7 +6682,7 @@
             </a:r>
           </a:p>
           <a:p>
-            <a:pPr marL="0" indent="0" algn="ctr">
+            <a:pPr marL="0" indent="0">
               <a:buNone/>
             </a:pPr>
             <a:endParaRPr lang="es-ES" sz="1100" dirty="0">
@@ -6696,7 +6691,7 @@
             </a:endParaRPr>
           </a:p>
           <a:p>
-            <a:pPr marL="0" indent="0" algn="ctr">
+            <a:pPr marL="0" indent="0">
               <a:buNone/>
             </a:pPr>
             <a:r>
@@ -6715,7 +6710,7 @@
             </a:r>
           </a:p>
           <a:p>
-            <a:pPr marL="0" indent="0" algn="ctr">
+            <a:pPr marL="0" indent="0">
               <a:buNone/>
             </a:pPr>
             <a:r>
@@ -6723,7 +6718,7 @@
                 <a:latin typeface="Times New Roman" panose="02020603050405020304" pitchFamily="18" charset="0"/>
                 <a:cs typeface="Times New Roman" panose="02020603050405020304" pitchFamily="18" charset="0"/>
               </a:rPr>
-              <a:t>29 de Septiembre 2025, Santiago, Chile</a:t>
+              <a:t>22 de octubre 2025, Santiago, Chile</a:t>
             </a:r>
           </a:p>
         </p:txBody>
@@ -6757,8 +6752,8 @@
         </p:blipFill>
         <p:spPr bwMode="auto">
           <a:xfrm>
-            <a:off x="6260740" y="2731548"/>
-            <a:ext cx="398008" cy="398008"/>
+            <a:off x="5153912" y="2109289"/>
+            <a:ext cx="1428750" cy="1428750"/>
           </a:xfrm>
           <a:prstGeom prst="rect">
             <a:avLst/>
@@ -6797,7 +6792,7 @@
         </p:blipFill>
         <p:spPr>
           <a:xfrm>
-            <a:off x="3558338" y="394431"/>
+            <a:off x="7764292" y="108352"/>
             <a:ext cx="1137067" cy="956207"/>
           </a:xfrm>
           <a:prstGeom prst="rect">
@@ -6819,7 +6814,7 @@
         </p:nvSpPr>
         <p:spPr>
           <a:xfrm>
-            <a:off x="3446848" y="1465853"/>
+            <a:off x="7693921" y="1064559"/>
             <a:ext cx="1360046" cy="615553"/>
           </a:xfrm>
           <a:prstGeom prst="rect">
@@ -6841,7 +6836,7 @@
           <a:p>
             <a:r>
               <a:rPr lang="es-CL" sz="800" dirty="0"/>
-              <a:t>Ingeniería de software II</a:t>
+              <a:t>Ingeniería de software I</a:t>
             </a:r>
           </a:p>
           <a:p>
@@ -7013,7 +7008,7 @@
         </p:nvSpPr>
         <p:spPr>
           <a:xfrm>
-            <a:off x="1398143" y="2904744"/>
+            <a:off x="609599" y="3297936"/>
             <a:ext cx="6347714" cy="1320800"/>
           </a:xfrm>
         </p:spPr>
@@ -7022,18 +7017,18 @@
           <a:lstStyle/>
           <a:p>
             <a:r>
-              <a:rPr lang="en-US" b="1" dirty="0"/>
+              <a:rPr lang="en-US" dirty="0"/>
               <a:t>A Continuaci</a:t>
             </a:r>
             <a:r>
-              <a:rPr lang="es-CL" b="1" dirty="0"/>
+              <a:rPr lang="es-CL" dirty="0"/>
               <a:t>ó</a:t>
             </a:r>
             <a:r>
-              <a:rPr lang="en-US" b="1" dirty="0"/>
+              <a:rPr lang="en-US" dirty="0"/>
               <a:t>n una Demo…</a:t>
             </a:r>
-            <a:endParaRPr lang="es-419" b="1" dirty="0"/>
+            <a:endParaRPr lang="es-419" dirty="0"/>
           </a:p>
         </p:txBody>
       </p:sp>
@@ -7080,8 +7075,8 @@
         </p:nvSpPr>
         <p:spPr>
           <a:xfrm>
-            <a:off x="1066799" y="2768600"/>
-            <a:ext cx="7010402" cy="879856"/>
+            <a:off x="609599" y="2768600"/>
+            <a:ext cx="7010402" cy="1320800"/>
           </a:xfrm>
         </p:spPr>
         <p:txBody>
@@ -7089,7 +7084,7 @@
           <a:lstStyle/>
           <a:p>
             <a:r>
-              <a:rPr lang="es-CL" b="1" dirty="0"/>
+              <a:rPr lang="es-CL" dirty="0"/>
               <a:t>Muchas gracias por su atención</a:t>
             </a:r>
           </a:p>
@@ -7097,40 +7092,10 @@
       </p:sp>
       <p:pic>
         <p:nvPicPr>
-          <p:cNvPr id="4" name="Imagen 3" descr="Icono&#10;&#10;El contenido generado por IA puede ser incorrecto.">
+          <p:cNvPr id="3" name="Picture 2" descr="Eugcom.cl">
             <a:extLst>
               <a:ext uri="{FF2B5EF4-FFF2-40B4-BE49-F238E27FC236}">
-                <a16:creationId xmlns:a16="http://schemas.microsoft.com/office/drawing/2014/main" id="{C8D6AE83-B76B-8550-E60C-FAFC2196D291}"/>
-              </a:ext>
-            </a:extLst>
-          </p:cNvPr>
-          <p:cNvPicPr>
-            <a:picLocks noChangeAspect="1"/>
-          </p:cNvPicPr>
-          <p:nvPr/>
-        </p:nvPicPr>
-        <p:blipFill>
-          <a:blip r:embed="rId2"/>
-          <a:stretch>
-            <a:fillRect/>
-          </a:stretch>
-        </p:blipFill>
-        <p:spPr>
-          <a:xfrm>
-            <a:off x="3559280" y="1061784"/>
-            <a:ext cx="1728691" cy="1453728"/>
-          </a:xfrm>
-          <a:prstGeom prst="rect">
-            <a:avLst/>
-          </a:prstGeom>
-        </p:spPr>
-      </p:pic>
-      <p:pic>
-        <p:nvPicPr>
-          <p:cNvPr id="5" name="Picture 2" descr="Eugcom.cl">
-            <a:extLst>
-              <a:ext uri="{FF2B5EF4-FFF2-40B4-BE49-F238E27FC236}">
-                <a16:creationId xmlns:a16="http://schemas.microsoft.com/office/drawing/2014/main" id="{469189A9-1DC7-EAF4-BC2E-7D4B3026796E}"/>
+                <a16:creationId xmlns:a16="http://schemas.microsoft.com/office/drawing/2014/main" id="{CE361E6D-63F2-415F-99E0-E542F0C8BFE9}"/>
               </a:ext>
             </a:extLst>
           </p:cNvPr>
@@ -7140,7 +7105,7 @@
           <p:nvPr/>
         </p:nvPicPr>
         <p:blipFill>
-          <a:blip r:embed="rId3">
+          <a:blip r:embed="rId2">
             <a:extLst>
               <a:ext uri="{28A0092B-C50C-407E-A947-70E740481C1C}">
                 <a14:useLocalDpi xmlns:a14="http://schemas.microsoft.com/office/drawing/2010/main" val="0"/>
@@ -7154,8 +7119,8 @@
         </p:blipFill>
         <p:spPr bwMode="auto">
           <a:xfrm>
-            <a:off x="3684093" y="3648456"/>
-            <a:ext cx="1479063" cy="1479063"/>
+            <a:off x="609599" y="496025"/>
+            <a:ext cx="1137067" cy="1137067"/>
           </a:xfrm>
           <a:prstGeom prst="rect">
             <a:avLst/>
@@ -7225,10 +7190,10 @@
           <a:p>
             <a:pPr algn="ctr"/>
             <a:r>
-              <a:rPr lang="es-CL" b="1" dirty="0"/>
+              <a:rPr lang="es-CL" dirty="0"/>
               <a:t>Contenido</a:t>
             </a:r>
-            <a:endParaRPr lang="es-419" b="1" dirty="0"/>
+            <a:endParaRPr lang="es-419" dirty="0"/>
           </a:p>
         </p:txBody>
       </p:sp>
@@ -7253,10 +7218,27 @@
           <a:bodyPr/>
           <a:lstStyle/>
           <a:p>
-            <a:pPr algn="just"/>
             <a:r>
               <a:rPr lang="es-CL" dirty="0"/>
-              <a:t>Incremento 2 </a:t>
+              <a:t>Incremento 3 </a:t>
+            </a:r>
+          </a:p>
+          <a:p>
+            <a:r>
+              <a:rPr lang="es-CL" dirty="0"/>
+              <a:t>Casos de uso </a:t>
+            </a:r>
+          </a:p>
+          <a:p>
+            <a:r>
+              <a:rPr lang="es-CL" dirty="0"/>
+              <a:t>Diagramas Secuencia</a:t>
+            </a:r>
+          </a:p>
+          <a:p>
+            <a:r>
+              <a:rPr lang="es-CL" dirty="0"/>
+              <a:t>Sprint backlog y casos de uso </a:t>
             </a:r>
             <a:r>
               <a:rPr lang="es-CL" dirty="0" err="1"/>
@@ -7264,28 +7246,13 @@
             </a:r>
             <a:r>
               <a:rPr lang="es-CL" dirty="0"/>
-              <a:t> 2</a:t>
-            </a:r>
-          </a:p>
-          <a:p>
-            <a:pPr algn="just"/>
+              <a:t> 3</a:t>
+            </a:r>
+          </a:p>
+          <a:p>
             <a:r>
               <a:rPr lang="es-CL" dirty="0"/>
-              <a:t>Casos de uso </a:t>
-            </a:r>
-          </a:p>
-          <a:p>
-            <a:pPr algn="just"/>
-            <a:r>
-              <a:rPr lang="es-CL" dirty="0"/>
-              <a:t>Diagramas Secuencia</a:t>
-            </a:r>
-          </a:p>
-          <a:p>
-            <a:pPr algn="just"/>
-            <a:r>
-              <a:rPr lang="es-CL" dirty="0"/>
-              <a:t>Sprint backlog y casos de uso </a:t>
+              <a:t>Tabla de esfuerzo </a:t>
             </a:r>
             <a:r>
               <a:rPr lang="es-CL" dirty="0" err="1"/>
@@ -7293,41 +7260,16 @@
             </a:r>
             <a:r>
               <a:rPr lang="es-CL" dirty="0"/>
-              <a:t> 3</a:t>
-            </a:r>
-          </a:p>
-          <a:p>
-            <a:pPr algn="just"/>
+              <a:t> 4</a:t>
+            </a:r>
+          </a:p>
+          <a:p>
             <a:r>
               <a:rPr lang="es-CL" dirty="0"/>
-              <a:t>Tabla de esfuerzo </a:t>
-            </a:r>
-            <a:r>
-              <a:rPr lang="es-CL" dirty="0" err="1"/>
-              <a:t>cap</a:t>
-            </a:r>
-            <a:r>
-              <a:rPr lang="es-CL" dirty="0"/>
-              <a:t> 4</a:t>
-            </a:r>
-          </a:p>
-          <a:p>
-            <a:pPr algn="just"/>
-            <a:r>
-              <a:rPr lang="es-CL" dirty="0"/>
-              <a:t>Pruebas Unitarias </a:t>
-            </a:r>
-            <a:r>
-              <a:rPr lang="es-CL" dirty="0" err="1"/>
-              <a:t>cap</a:t>
-            </a:r>
-            <a:r>
-              <a:rPr lang="es-CL" dirty="0"/>
-              <a:t> 5</a:t>
-            </a:r>
-          </a:p>
-          <a:p>
-            <a:pPr algn="just"/>
+              <a:t>Pruebas Unitarias cap5</a:t>
+            </a:r>
+          </a:p>
+          <a:p>
             <a:r>
               <a:rPr lang="es-CL" dirty="0"/>
               <a:t>Pruebas de sistema </a:t>
@@ -7525,7 +7467,7 @@
           <a:lstStyle/>
           <a:p>
             <a:r>
-              <a:rPr lang="es-419" sz="3100" b="1" dirty="0"/>
+              <a:rPr lang="es-419" sz="3100"/>
               <a:t>Introducción</a:t>
             </a:r>
           </a:p>
@@ -7652,53 +7594,6 @@
           </a:p>
         </p:txBody>
       </p:sp>
-      <p:pic>
-        <p:nvPicPr>
-          <p:cNvPr id="5" name="Picture 2" descr="Eugcom.cl">
-            <a:extLst>
-              <a:ext uri="{FF2B5EF4-FFF2-40B4-BE49-F238E27FC236}">
-                <a16:creationId xmlns:a16="http://schemas.microsoft.com/office/drawing/2014/main" id="{9DE2593D-C8E3-D325-8501-95C378098BB3}"/>
-              </a:ext>
-            </a:extLst>
-          </p:cNvPr>
-          <p:cNvPicPr>
-            <a:picLocks noChangeAspect="1" noChangeArrowheads="1"/>
-          </p:cNvPicPr>
-          <p:nvPr/>
-        </p:nvPicPr>
-        <p:blipFill>
-          <a:blip r:embed="rId2">
-            <a:extLst>
-              <a:ext uri="{28A0092B-C50C-407E-A947-70E740481C1C}">
-                <a14:useLocalDpi xmlns:a14="http://schemas.microsoft.com/office/drawing/2010/main" val="0"/>
-              </a:ext>
-            </a:extLst>
-          </a:blip>
-          <a:srcRect/>
-          <a:stretch>
-            <a:fillRect/>
-          </a:stretch>
-        </p:blipFill>
-        <p:spPr bwMode="auto">
-          <a:xfrm>
-            <a:off x="102849" y="108353"/>
-            <a:ext cx="577448" cy="577448"/>
-          </a:xfrm>
-          <a:prstGeom prst="rect">
-            <a:avLst/>
-          </a:prstGeom>
-          <a:noFill/>
-          <a:extLst>
-            <a:ext uri="{909E8E84-426E-40DD-AFC4-6F175D3DCCD1}">
-              <a14:hiddenFill xmlns:a14="http://schemas.microsoft.com/office/drawing/2010/main">
-                <a:solidFill>
-                  <a:srgbClr val="FFFFFF"/>
-                </a:solidFill>
-              </a14:hiddenFill>
-            </a:ext>
-          </a:extLst>
-        </p:spPr>
-      </p:pic>
     </p:spTree>
   </p:cSld>
   <p:clrMapOvr>
@@ -7734,29 +7629,24 @@
             <p:ph type="title"/>
           </p:nvPr>
         </p:nvSpPr>
-        <p:spPr>
-          <a:xfrm>
-            <a:off x="2851403" y="448893"/>
-            <a:ext cx="3441193" cy="807720"/>
-          </a:xfrm>
-        </p:spPr>
+        <p:spPr/>
         <p:txBody>
           <a:bodyPr/>
           <a:lstStyle/>
           <a:p>
             <a:r>
-              <a:rPr b="1" dirty="0" err="1"/>
+              <a:rPr dirty="0" err="1"/>
               <a:t>Incremento</a:t>
             </a:r>
             <a:r>
-              <a:rPr b="1" dirty="0"/>
+              <a:rPr dirty="0"/>
               <a:t> </a:t>
             </a:r>
             <a:r>
-              <a:rPr lang="es-CL" b="1" dirty="0"/>
-              <a:t>2</a:t>
-            </a:r>
-            <a:endParaRPr b="1" dirty="0"/>
+              <a:rPr lang="es-CL" dirty="0"/>
+              <a:t>3</a:t>
+            </a:r>
+            <a:endParaRPr dirty="0"/>
           </a:p>
         </p:txBody>
       </p:sp>
@@ -7777,7 +7667,7 @@
           <a:p>
             <a:r>
               <a:rPr lang="es-CL" dirty="0"/>
-              <a:t>45</a:t>
+              <a:t>65</a:t>
             </a:r>
             <a:r>
               <a:rPr dirty="0"/>
@@ -7820,7 +7710,7 @@
             </a:r>
             <a:r>
               <a:rPr lang="es-CL" dirty="0"/>
-              <a:t>91</a:t>
+              <a:t>100</a:t>
             </a:r>
             <a:r>
               <a:rPr dirty="0"/>
@@ -7858,8 +7748,8 @@
         </p:blipFill>
         <p:spPr bwMode="auto">
           <a:xfrm>
-            <a:off x="102849" y="108353"/>
-            <a:ext cx="577448" cy="577448"/>
+            <a:off x="5896737" y="2000250"/>
+            <a:ext cx="1428750" cy="1428750"/>
           </a:xfrm>
           <a:prstGeom prst="rect">
             <a:avLst/>
@@ -7950,94 +7840,6 @@
           </a:p>
         </p:txBody>
       </p:sp>
-      <p:pic>
-        <p:nvPicPr>
-          <p:cNvPr id="6" name="Imagen 5" descr="Gráfico, Gráfico de barras, Histograma&#10;&#10;El contenido generado por IA puede ser incorrecto.">
-            <a:extLst>
-              <a:ext uri="{FF2B5EF4-FFF2-40B4-BE49-F238E27FC236}">
-                <a16:creationId xmlns:a16="http://schemas.microsoft.com/office/drawing/2014/main" id="{1A250E69-2420-A118-6C38-59F8EC6B6975}"/>
-              </a:ext>
-            </a:extLst>
-          </p:cNvPr>
-          <p:cNvPicPr>
-            <a:picLocks noChangeAspect="1"/>
-          </p:cNvPicPr>
-          <p:nvPr/>
-        </p:nvPicPr>
-        <p:blipFill>
-          <a:blip r:embed="rId4"/>
-          <a:stretch>
-            <a:fillRect/>
-          </a:stretch>
-        </p:blipFill>
-        <p:spPr>
-          <a:xfrm>
-            <a:off x="509650" y="3654900"/>
-            <a:ext cx="3217417" cy="2845253"/>
-          </a:xfrm>
-          <a:prstGeom prst="rect">
-            <a:avLst/>
-          </a:prstGeom>
-        </p:spPr>
-        <p:style>
-          <a:lnRef idx="2">
-            <a:schemeClr val="dk1"/>
-          </a:lnRef>
-          <a:fillRef idx="1">
-            <a:schemeClr val="lt1"/>
-          </a:fillRef>
-          <a:effectRef idx="0">
-            <a:schemeClr val="dk1"/>
-          </a:effectRef>
-          <a:fontRef idx="minor">
-            <a:schemeClr val="dk1"/>
-          </a:fontRef>
-        </p:style>
-      </p:pic>
-      <p:pic>
-        <p:nvPicPr>
-          <p:cNvPr id="7" name="Imagen 6" descr="Gráfico, Gráfico circular&#10;&#10;El contenido generado por IA puede ser incorrecto.">
-            <a:extLst>
-              <a:ext uri="{FF2B5EF4-FFF2-40B4-BE49-F238E27FC236}">
-                <a16:creationId xmlns:a16="http://schemas.microsoft.com/office/drawing/2014/main" id="{79BE7D5A-2AB0-69F1-0152-E687AB796A25}"/>
-              </a:ext>
-            </a:extLst>
-          </p:cNvPr>
-          <p:cNvPicPr>
-            <a:picLocks noChangeAspect="1"/>
-          </p:cNvPicPr>
-          <p:nvPr/>
-        </p:nvPicPr>
-        <p:blipFill>
-          <a:blip r:embed="rId5"/>
-          <a:stretch>
-            <a:fillRect/>
-          </a:stretch>
-        </p:blipFill>
-        <p:spPr>
-          <a:xfrm>
-            <a:off x="4400933" y="3654901"/>
-            <a:ext cx="2656329" cy="2845252"/>
-          </a:xfrm>
-          <a:prstGeom prst="rect">
-            <a:avLst/>
-          </a:prstGeom>
-        </p:spPr>
-        <p:style>
-          <a:lnRef idx="2">
-            <a:schemeClr val="dk1"/>
-          </a:lnRef>
-          <a:fillRef idx="1">
-            <a:schemeClr val="lt1"/>
-          </a:fillRef>
-          <a:effectRef idx="0">
-            <a:schemeClr val="dk1"/>
-          </a:effectRef>
-          <a:fontRef idx="minor">
-            <a:schemeClr val="dk1"/>
-          </a:fontRef>
-        </p:style>
-      </p:pic>
     </p:spTree>
   </p:cSld>
   <p:clrMapOvr>
@@ -8068,7 +7870,7 @@
           <p:cNvPr id="2" name="Título 1">
             <a:extLst>
               <a:ext uri="{FF2B5EF4-FFF2-40B4-BE49-F238E27FC236}">
-                <a16:creationId xmlns:a16="http://schemas.microsoft.com/office/drawing/2014/main" id="{8F45BA60-3D89-444B-B3F1-D90FC5798A47}"/>
+                <a16:creationId xmlns:a16="http://schemas.microsoft.com/office/drawing/2014/main" id="{42D6B30E-CF24-4AD5-8A2B-CF35257C303D}"/>
               </a:ext>
             </a:extLst>
           </p:cNvPr>
@@ -8079,29 +7881,24 @@
             <p:ph type="title"/>
           </p:nvPr>
         </p:nvSpPr>
-        <p:spPr>
-          <a:xfrm>
-            <a:off x="2378325" y="336087"/>
-            <a:ext cx="2810257" cy="771144"/>
-          </a:xfrm>
-        </p:spPr>
+        <p:spPr/>
         <p:txBody>
           <a:bodyPr/>
           <a:lstStyle/>
           <a:p>
             <a:r>
-              <a:rPr lang="es-CL" b="1" dirty="0"/>
-              <a:t>Caso de uso</a:t>
+              <a:rPr lang="es-CL" dirty="0"/>
+              <a:t>Casos de uso </a:t>
             </a:r>
           </a:p>
         </p:txBody>
       </p:sp>
       <p:pic>
         <p:nvPicPr>
-          <p:cNvPr id="8" name="Imagen 7">
+          <p:cNvPr id="4" name="Imagen 3">
             <a:extLst>
               <a:ext uri="{FF2B5EF4-FFF2-40B4-BE49-F238E27FC236}">
-                <a16:creationId xmlns:a16="http://schemas.microsoft.com/office/drawing/2014/main" id="{34DA97F9-E0AE-4898-81E6-F3825A142225}"/>
+                <a16:creationId xmlns:a16="http://schemas.microsoft.com/office/drawing/2014/main" id="{39353D29-2164-4C2E-8D11-CEFDA18E067D}"/>
               </a:ext>
             </a:extLst>
           </p:cNvPr>
@@ -8118,109 +7915,18 @@
         </p:blipFill>
         <p:spPr>
           <a:xfrm>
-            <a:off x="1831395" y="1617950"/>
-            <a:ext cx="5481209" cy="4215966"/>
-          </a:xfrm>
-          <a:prstGeom prst="rect">
-            <a:avLst/>
-          </a:prstGeom>
-          <a:ln w="38100" cap="sq">
-            <a:solidFill>
-              <a:srgbClr val="000000"/>
-            </a:solidFill>
-            <a:prstDash val="solid"/>
-            <a:miter lim="800000"/>
-          </a:ln>
-          <a:effectLst>
-            <a:outerShdw blurRad="50800" dist="38100" dir="2700000" algn="tl" rotWithShape="0">
-              <a:srgbClr val="000000">
-                <a:alpha val="43000"/>
-              </a:srgbClr>
-            </a:outerShdw>
-          </a:effectLst>
-        </p:spPr>
-      </p:pic>
-      <p:pic>
-        <p:nvPicPr>
-          <p:cNvPr id="3" name="Imagen 2" descr="Icono&#10;&#10;El contenido generado por IA puede ser incorrecto.">
-            <a:extLst>
-              <a:ext uri="{FF2B5EF4-FFF2-40B4-BE49-F238E27FC236}">
-                <a16:creationId xmlns:a16="http://schemas.microsoft.com/office/drawing/2014/main" id="{A0DDD05E-97D6-B8E4-F170-B3372DA001E5}"/>
-              </a:ext>
-            </a:extLst>
-          </p:cNvPr>
-          <p:cNvPicPr>
-            <a:picLocks noChangeAspect="1"/>
-          </p:cNvPicPr>
-          <p:nvPr/>
-        </p:nvPicPr>
-        <p:blipFill>
-          <a:blip r:embed="rId3"/>
-          <a:stretch>
-            <a:fillRect/>
-          </a:stretch>
-        </p:blipFill>
-        <p:spPr>
-          <a:xfrm>
-            <a:off x="7764292" y="108352"/>
-            <a:ext cx="1137067" cy="956207"/>
+            <a:off x="609599" y="1386541"/>
+            <a:ext cx="5878968" cy="4530165"/>
           </a:xfrm>
           <a:prstGeom prst="rect">
             <a:avLst/>
           </a:prstGeom>
         </p:spPr>
       </p:pic>
-      <p:pic>
-        <p:nvPicPr>
-          <p:cNvPr id="4" name="Picture 2" descr="Eugcom.cl">
-            <a:extLst>
-              <a:ext uri="{FF2B5EF4-FFF2-40B4-BE49-F238E27FC236}">
-                <a16:creationId xmlns:a16="http://schemas.microsoft.com/office/drawing/2014/main" id="{3375520D-3975-2513-BC47-AF83AB4BA93B}"/>
-              </a:ext>
-            </a:extLst>
-          </p:cNvPr>
-          <p:cNvPicPr>
-            <a:picLocks noChangeAspect="1" noChangeArrowheads="1"/>
-          </p:cNvPicPr>
-          <p:nvPr/>
-        </p:nvPicPr>
-        <p:blipFill>
-          <a:blip r:embed="rId4">
-            <a:extLst>
-              <a:ext uri="{28A0092B-C50C-407E-A947-70E740481C1C}">
-                <a14:useLocalDpi xmlns:a14="http://schemas.microsoft.com/office/drawing/2010/main" val="0"/>
-              </a:ext>
-            </a:extLst>
-          </a:blip>
-          <a:srcRect/>
-          <a:stretch>
-            <a:fillRect/>
-          </a:stretch>
-        </p:blipFill>
-        <p:spPr bwMode="auto">
-          <a:xfrm>
-            <a:off x="102849" y="108353"/>
-            <a:ext cx="577448" cy="577448"/>
-          </a:xfrm>
-          <a:prstGeom prst="rect">
-            <a:avLst/>
-          </a:prstGeom>
-          <a:noFill/>
-          <a:extLst>
-            <a:ext uri="{909E8E84-426E-40DD-AFC4-6F175D3DCCD1}">
-              <a14:hiddenFill xmlns:a14="http://schemas.microsoft.com/office/drawing/2010/main">
-                <a:solidFill>
-                  <a:srgbClr val="FFFFFF"/>
-                </a:solidFill>
-              </a14:hiddenFill>
-            </a:ext>
-          </a:extLst>
-        </p:spPr>
-      </p:pic>
     </p:spTree>
     <p:extLst>
       <p:ext uri="{BB962C8B-B14F-4D97-AF65-F5344CB8AC3E}">
-        <p14:creationId xmlns:p14="http://schemas.microsoft.com/office/powerpoint/2010/main" val="3065052590"/>
+        <p14:creationId xmlns:p14="http://schemas.microsoft.com/office/powerpoint/2010/main" val="3175595360"/>
       </p:ext>
     </p:extLst>
   </p:cSld>
@@ -8252,7 +7958,7 @@
           <p:cNvPr id="2" name="Título 1">
             <a:extLst>
               <a:ext uri="{FF2B5EF4-FFF2-40B4-BE49-F238E27FC236}">
-                <a16:creationId xmlns:a16="http://schemas.microsoft.com/office/drawing/2014/main" id="{F1866796-51B0-45E3-AD8F-D35E7FACE5F4}"/>
+                <a16:creationId xmlns:a16="http://schemas.microsoft.com/office/drawing/2014/main" id="{8F45BA60-3D89-444B-B3F1-D90FC5798A47}"/>
               </a:ext>
             </a:extLst>
           </p:cNvPr>
@@ -8263,31 +7969,24 @@
             <p:ph type="title"/>
           </p:nvPr>
         </p:nvSpPr>
-        <p:spPr>
-          <a:xfrm>
-            <a:off x="1548464" y="226359"/>
-            <a:ext cx="5421323" cy="844296"/>
-          </a:xfrm>
-        </p:spPr>
-        <p:txBody>
-          <a:bodyPr>
-            <a:noAutofit/>
-          </a:bodyPr>
+        <p:spPr/>
+        <p:txBody>
+          <a:bodyPr/>
           <a:lstStyle/>
           <a:p>
             <a:r>
-              <a:rPr lang="es-CL" b="1" dirty="0"/>
-              <a:t>Diagramas de secuencia</a:t>
+              <a:rPr lang="es-CL" dirty="0"/>
+              <a:t>Casos de uso</a:t>
             </a:r>
           </a:p>
         </p:txBody>
       </p:sp>
       <p:pic>
         <p:nvPicPr>
-          <p:cNvPr id="5" name="Imagen 4">
+          <p:cNvPr id="4" name="Imagen 3">
             <a:extLst>
               <a:ext uri="{FF2B5EF4-FFF2-40B4-BE49-F238E27FC236}">
-                <a16:creationId xmlns:a16="http://schemas.microsoft.com/office/drawing/2014/main" id="{AB9821BF-C17E-4414-AE0B-F95BB061E5CC}"/>
+                <a16:creationId xmlns:a16="http://schemas.microsoft.com/office/drawing/2014/main" id="{AFDFFE1A-81BE-44AE-80AB-FB3A25D900EE}"/>
               </a:ext>
             </a:extLst>
           </p:cNvPr>
@@ -8304,30 +8003,78 @@
         </p:blipFill>
         <p:spPr>
           <a:xfrm>
-            <a:off x="680297" y="1627531"/>
-            <a:ext cx="6768702" cy="4489445"/>
+            <a:off x="609599" y="1345457"/>
+            <a:ext cx="6015319" cy="4526425"/>
           </a:xfrm>
           <a:prstGeom prst="rect">
             <a:avLst/>
           </a:prstGeom>
-          <a:ln>
-            <a:noFill/>
-          </a:ln>
-          <a:effectLst>
-            <a:outerShdw blurRad="190500" algn="tl" rotWithShape="0">
-              <a:srgbClr val="000000">
-                <a:alpha val="70000"/>
-              </a:srgbClr>
-            </a:outerShdw>
-          </a:effectLst>
         </p:spPr>
       </p:pic>
+    </p:spTree>
+    <p:extLst>
+      <p:ext uri="{BB962C8B-B14F-4D97-AF65-F5344CB8AC3E}">
+        <p14:creationId xmlns:p14="http://schemas.microsoft.com/office/powerpoint/2010/main" val="3065052590"/>
+      </p:ext>
+    </p:extLst>
+  </p:cSld>
+  <p:clrMapOvr>
+    <a:masterClrMapping/>
+  </p:clrMapOvr>
+</p:sld>
+</file>
+
+<file path=ppt/slides/slide7.xml><?xml version="1.0" encoding="utf-8"?>
+<p:sld xmlns:a="http://schemas.openxmlformats.org/drawingml/2006/main" xmlns:r="http://schemas.openxmlformats.org/officeDocument/2006/relationships" xmlns:p="http://schemas.openxmlformats.org/presentationml/2006/main">
+  <p:cSld>
+    <p:spTree>
+      <p:nvGrpSpPr>
+        <p:cNvPr id="1" name=""/>
+        <p:cNvGrpSpPr/>
+        <p:nvPr/>
+      </p:nvGrpSpPr>
+      <p:grpSpPr>
+        <a:xfrm>
+          <a:off x="0" y="0"/>
+          <a:ext cx="0" cy="0"/>
+          <a:chOff x="0" y="0"/>
+          <a:chExt cx="0" cy="0"/>
+        </a:xfrm>
+      </p:grpSpPr>
+      <p:sp>
+        <p:nvSpPr>
+          <p:cNvPr id="2" name="Título 1">
+            <a:extLst>
+              <a:ext uri="{FF2B5EF4-FFF2-40B4-BE49-F238E27FC236}">
+                <a16:creationId xmlns:a16="http://schemas.microsoft.com/office/drawing/2014/main" id="{F1866796-51B0-45E3-AD8F-D35E7FACE5F4}"/>
+              </a:ext>
+            </a:extLst>
+          </p:cNvPr>
+          <p:cNvSpPr>
+            <a:spLocks noGrp="1"/>
+          </p:cNvSpPr>
+          <p:nvPr>
+            <p:ph type="title"/>
+          </p:nvPr>
+        </p:nvSpPr>
+        <p:spPr/>
+        <p:txBody>
+          <a:bodyPr/>
+          <a:lstStyle/>
+          <a:p>
+            <a:r>
+              <a:rPr lang="es-CL" dirty="0"/>
+              <a:t>Diagramas de secuencia</a:t>
+            </a:r>
+          </a:p>
+        </p:txBody>
+      </p:sp>
       <p:pic>
         <p:nvPicPr>
-          <p:cNvPr id="3" name="Imagen 2" descr="Icono&#10;&#10;El contenido generado por IA puede ser incorrecto.">
+          <p:cNvPr id="8" name="Imagen 7">
             <a:extLst>
               <a:ext uri="{FF2B5EF4-FFF2-40B4-BE49-F238E27FC236}">
-                <a16:creationId xmlns:a16="http://schemas.microsoft.com/office/drawing/2014/main" id="{C8E875FD-C279-295C-FA69-BCCC21A2B631}"/>
+                <a16:creationId xmlns:a16="http://schemas.microsoft.com/office/drawing/2014/main" id="{02CCDF87-E8D3-46FA-BE31-9BAA591DE4BB}"/>
               </a:ext>
             </a:extLst>
           </p:cNvPr>
@@ -8337,66 +8084,19 @@
           <p:nvPr/>
         </p:nvPicPr>
         <p:blipFill>
-          <a:blip r:embed="rId3"/>
+          <a:blip r:embed="rId2"/>
           <a:stretch>
             <a:fillRect/>
           </a:stretch>
         </p:blipFill>
         <p:spPr>
           <a:xfrm>
-            <a:off x="7764292" y="108352"/>
-            <a:ext cx="1137067" cy="956207"/>
+            <a:off x="215153" y="1443100"/>
+            <a:ext cx="7449671" cy="4195700"/>
           </a:xfrm>
           <a:prstGeom prst="rect">
             <a:avLst/>
           </a:prstGeom>
-        </p:spPr>
-      </p:pic>
-      <p:pic>
-        <p:nvPicPr>
-          <p:cNvPr id="4" name="Picture 2" descr="Eugcom.cl">
-            <a:extLst>
-              <a:ext uri="{FF2B5EF4-FFF2-40B4-BE49-F238E27FC236}">
-                <a16:creationId xmlns:a16="http://schemas.microsoft.com/office/drawing/2014/main" id="{25E4DD3E-7B80-340E-04C8-89F9A65C05BC}"/>
-              </a:ext>
-            </a:extLst>
-          </p:cNvPr>
-          <p:cNvPicPr>
-            <a:picLocks noChangeAspect="1" noChangeArrowheads="1"/>
-          </p:cNvPicPr>
-          <p:nvPr/>
-        </p:nvPicPr>
-        <p:blipFill>
-          <a:blip r:embed="rId4">
-            <a:extLst>
-              <a:ext uri="{28A0092B-C50C-407E-A947-70E740481C1C}">
-                <a14:useLocalDpi xmlns:a14="http://schemas.microsoft.com/office/drawing/2010/main" val="0"/>
-              </a:ext>
-            </a:extLst>
-          </a:blip>
-          <a:srcRect/>
-          <a:stretch>
-            <a:fillRect/>
-          </a:stretch>
-        </p:blipFill>
-        <p:spPr bwMode="auto">
-          <a:xfrm>
-            <a:off x="102849" y="108353"/>
-            <a:ext cx="577448" cy="577448"/>
-          </a:xfrm>
-          <a:prstGeom prst="rect">
-            <a:avLst/>
-          </a:prstGeom>
-          <a:noFill/>
-          <a:extLst>
-            <a:ext uri="{909E8E84-426E-40DD-AFC4-6F175D3DCCD1}">
-              <a14:hiddenFill xmlns:a14="http://schemas.microsoft.com/office/drawing/2010/main">
-                <a:solidFill>
-                  <a:srgbClr val="FFFFFF"/>
-                </a:solidFill>
-              </a14:hiddenFill>
-            </a:ext>
-          </a:extLst>
         </p:spPr>
       </p:pic>
     </p:spTree>
@@ -8412,7 +8112,7 @@
 </p:sld>
 </file>
 
-<file path=ppt/slides/slide7.xml><?xml version="1.0" encoding="utf-8"?>
+<file path=ppt/slides/slide8.xml><?xml version="1.0" encoding="utf-8"?>
 <p:sld xmlns:a="http://schemas.openxmlformats.org/drawingml/2006/main" xmlns:r="http://schemas.openxmlformats.org/officeDocument/2006/relationships" xmlns:p="http://schemas.openxmlformats.org/presentationml/2006/main">
   <p:cSld>
     <p:bg>
@@ -9202,13 +8902,13 @@
         </p:nvSpPr>
         <p:spPr>
           <a:xfrm>
-            <a:off x="666484" y="263050"/>
-            <a:ext cx="6612075" cy="733570"/>
+            <a:off x="1095571" y="-23097"/>
+            <a:ext cx="5755351" cy="1087656"/>
           </a:xfrm>
         </p:spPr>
         <p:txBody>
           <a:bodyPr vert="horz" lIns="91440" tIns="45720" rIns="91440" bIns="45720" rtlCol="0" anchor="b">
-            <a:noAutofit/>
+            <a:normAutofit/>
           </a:bodyPr>
           <a:lstStyle/>
           <a:p>
@@ -9218,7 +8918,7 @@
               </a:lnSpc>
             </a:pPr>
             <a:r>
-              <a:rPr lang="en-US" b="1" kern="1200" dirty="0">
+              <a:rPr lang="en-US" kern="1200" dirty="0">
                 <a:solidFill>
                   <a:schemeClr val="accent1"/>
                 </a:solidFill>
@@ -9307,10 +9007,10 @@
       </p:sp>
       <p:pic>
         <p:nvPicPr>
-          <p:cNvPr id="11" name="Imagen 10">
+          <p:cNvPr id="4" name="Imagen 3">
             <a:extLst>
               <a:ext uri="{FF2B5EF4-FFF2-40B4-BE49-F238E27FC236}">
-                <a16:creationId xmlns:a16="http://schemas.microsoft.com/office/drawing/2014/main" id="{39E09C0E-AFB6-49B0-8F26-D56D1CA01BBC}"/>
+                <a16:creationId xmlns:a16="http://schemas.microsoft.com/office/drawing/2014/main" id="{89F14EA6-43DC-4209-9871-7A77C454F150}"/>
               </a:ext>
             </a:extLst>
           </p:cNvPr>
@@ -9327,334 +9027,15 @@
         </p:blipFill>
         <p:spPr>
           <a:xfrm>
-            <a:off x="130440" y="1409178"/>
-            <a:ext cx="7332093" cy="1796353"/>
-          </a:xfrm>
-          <a:prstGeom prst="rect">
-            <a:avLst/>
-          </a:prstGeom>
-          <a:ln>
-            <a:noFill/>
-          </a:ln>
-          <a:effectLst>
-            <a:outerShdw blurRad="292100" dist="139700" dir="2700000" algn="tl" rotWithShape="0">
-              <a:srgbClr val="333333">
-                <a:alpha val="65000"/>
-              </a:srgbClr>
-            </a:outerShdw>
-          </a:effectLst>
-        </p:spPr>
-      </p:pic>
-      <p:pic>
-        <p:nvPicPr>
-          <p:cNvPr id="13" name="Imagen 12">
-            <a:extLst>
-              <a:ext uri="{FF2B5EF4-FFF2-40B4-BE49-F238E27FC236}">
-                <a16:creationId xmlns:a16="http://schemas.microsoft.com/office/drawing/2014/main" id="{2F79A4E4-3370-47ED-AD18-237AB4E57F2E}"/>
-              </a:ext>
-            </a:extLst>
-          </p:cNvPr>
-          <p:cNvPicPr>
-            <a:picLocks noChangeAspect="1"/>
-          </p:cNvPicPr>
-          <p:nvPr/>
-        </p:nvPicPr>
-        <p:blipFill>
-          <a:blip r:embed="rId4"/>
-          <a:stretch>
-            <a:fillRect/>
-          </a:stretch>
-        </p:blipFill>
-        <p:spPr>
-          <a:xfrm>
-            <a:off x="130439" y="3205531"/>
-            <a:ext cx="7332093" cy="3129330"/>
-          </a:xfrm>
-          <a:prstGeom prst="rect">
-            <a:avLst/>
-          </a:prstGeom>
-          <a:ln>
-            <a:noFill/>
-          </a:ln>
-          <a:effectLst>
-            <a:outerShdw blurRad="292100" dist="139700" dir="2700000" algn="tl" rotWithShape="0">
-              <a:srgbClr val="333333">
-                <a:alpha val="65000"/>
-              </a:srgbClr>
-            </a:outerShdw>
-          </a:effectLst>
-        </p:spPr>
-      </p:pic>
-      <p:pic>
-        <p:nvPicPr>
-          <p:cNvPr id="3" name="Picture 2" descr="Eugcom.cl">
-            <a:extLst>
-              <a:ext uri="{FF2B5EF4-FFF2-40B4-BE49-F238E27FC236}">
-                <a16:creationId xmlns:a16="http://schemas.microsoft.com/office/drawing/2014/main" id="{0D42CBF2-3925-4B85-D564-4F24C29F3511}"/>
-              </a:ext>
-            </a:extLst>
-          </p:cNvPr>
-          <p:cNvPicPr>
-            <a:picLocks noChangeAspect="1" noChangeArrowheads="1"/>
-          </p:cNvPicPr>
-          <p:nvPr/>
-        </p:nvPicPr>
-        <p:blipFill>
-          <a:blip r:embed="rId5">
-            <a:extLst>
-              <a:ext uri="{28A0092B-C50C-407E-A947-70E740481C1C}">
-                <a14:useLocalDpi xmlns:a14="http://schemas.microsoft.com/office/drawing/2010/main" val="0"/>
-              </a:ext>
-            </a:extLst>
-          </a:blip>
-          <a:srcRect/>
-          <a:stretch>
-            <a:fillRect/>
-          </a:stretch>
-        </p:blipFill>
-        <p:spPr bwMode="auto">
-          <a:xfrm>
-            <a:off x="102849" y="108353"/>
-            <a:ext cx="577448" cy="577448"/>
-          </a:xfrm>
-          <a:prstGeom prst="rect">
-            <a:avLst/>
-          </a:prstGeom>
-          <a:noFill/>
-          <a:extLst>
-            <a:ext uri="{909E8E84-426E-40DD-AFC4-6F175D3DCCD1}">
-              <a14:hiddenFill xmlns:a14="http://schemas.microsoft.com/office/drawing/2010/main">
-                <a:solidFill>
-                  <a:srgbClr val="FFFFFF"/>
-                </a:solidFill>
-              </a14:hiddenFill>
-            </a:ext>
-          </a:extLst>
-        </p:spPr>
-      </p:pic>
-    </p:spTree>
-  </p:cSld>
-  <p:clrMapOvr>
-    <a:masterClrMapping/>
-  </p:clrMapOvr>
-</p:sld>
-</file>
-
-<file path=ppt/slides/slide8.xml><?xml version="1.0" encoding="utf-8"?>
-<p:sld xmlns:a="http://schemas.openxmlformats.org/drawingml/2006/main" xmlns:r="http://schemas.openxmlformats.org/officeDocument/2006/relationships" xmlns:p="http://schemas.openxmlformats.org/presentationml/2006/main">
-  <p:cSld>
-    <p:spTree>
-      <p:nvGrpSpPr>
-        <p:cNvPr id="1" name=""/>
-        <p:cNvGrpSpPr/>
-        <p:nvPr/>
-      </p:nvGrpSpPr>
-      <p:grpSpPr>
-        <a:xfrm>
-          <a:off x="0" y="0"/>
-          <a:ext cx="0" cy="0"/>
-          <a:chOff x="0" y="0"/>
-          <a:chExt cx="0" cy="0"/>
-        </a:xfrm>
-      </p:grpSpPr>
-      <p:sp>
-        <p:nvSpPr>
-          <p:cNvPr id="2" name="Título 1">
-            <a:extLst>
-              <a:ext uri="{FF2B5EF4-FFF2-40B4-BE49-F238E27FC236}">
-                <a16:creationId xmlns:a16="http://schemas.microsoft.com/office/drawing/2014/main" id="{DD908331-17C3-4D0E-A3B7-4B0FCF8818DF}"/>
-              </a:ext>
-            </a:extLst>
-          </p:cNvPr>
-          <p:cNvSpPr>
-            <a:spLocks noGrp="1"/>
-          </p:cNvSpPr>
-          <p:nvPr>
-            <p:ph type="title"/>
-          </p:nvPr>
-        </p:nvSpPr>
-        <p:spPr>
-          <a:xfrm>
-            <a:off x="878638" y="284924"/>
-            <a:ext cx="6687313" cy="826008"/>
-          </a:xfrm>
-        </p:spPr>
-        <p:txBody>
-          <a:bodyPr/>
-          <a:lstStyle/>
-          <a:p>
-            <a:r>
-              <a:rPr lang="es-CL" b="1" dirty="0"/>
-              <a:t>Sprint Backlog y casos de uso</a:t>
-            </a:r>
-          </a:p>
-        </p:txBody>
-      </p:sp>
-      <p:pic>
-        <p:nvPicPr>
-          <p:cNvPr id="5" name="Marcador de contenido 4">
-            <a:extLst>
-              <a:ext uri="{FF2B5EF4-FFF2-40B4-BE49-F238E27FC236}">
-                <a16:creationId xmlns:a16="http://schemas.microsoft.com/office/drawing/2014/main" id="{98304ADB-99DD-4575-BA4D-26BD853F97E4}"/>
-              </a:ext>
-            </a:extLst>
-          </p:cNvPr>
-          <p:cNvPicPr>
-            <a:picLocks noGrp="1" noChangeAspect="1"/>
-          </p:cNvPicPr>
-          <p:nvPr>
-            <p:ph idx="1"/>
-          </p:nvPr>
-        </p:nvPicPr>
-        <p:blipFill>
-          <a:blip r:embed="rId2"/>
-          <a:stretch>
-            <a:fillRect/>
-          </a:stretch>
-        </p:blipFill>
-        <p:spPr>
-          <a:xfrm>
-            <a:off x="180777" y="1590927"/>
-            <a:ext cx="7342094" cy="2707230"/>
-          </a:xfrm>
-          <a:prstGeom prst="rect">
-            <a:avLst/>
-          </a:prstGeom>
-          <a:ln>
-            <a:noFill/>
-          </a:ln>
-          <a:effectLst>
-            <a:outerShdw blurRad="292100" dist="139700" dir="2700000" algn="tl" rotWithShape="0">
-              <a:srgbClr val="333333">
-                <a:alpha val="65000"/>
-              </a:srgbClr>
-            </a:outerShdw>
-          </a:effectLst>
-        </p:spPr>
-      </p:pic>
-      <p:pic>
-        <p:nvPicPr>
-          <p:cNvPr id="7" name="Imagen 6">
-            <a:extLst>
-              <a:ext uri="{FF2B5EF4-FFF2-40B4-BE49-F238E27FC236}">
-                <a16:creationId xmlns:a16="http://schemas.microsoft.com/office/drawing/2014/main" id="{C326FECB-BE6E-4807-B410-EFB562C83276}"/>
-              </a:ext>
-            </a:extLst>
-          </p:cNvPr>
-          <p:cNvPicPr>
-            <a:picLocks noChangeAspect="1"/>
-          </p:cNvPicPr>
-          <p:nvPr/>
-        </p:nvPicPr>
-        <p:blipFill>
-          <a:blip r:embed="rId3"/>
-          <a:stretch>
-            <a:fillRect/>
-          </a:stretch>
-        </p:blipFill>
-        <p:spPr>
-          <a:xfrm>
-            <a:off x="180777" y="4304082"/>
-            <a:ext cx="7342094" cy="1925982"/>
-          </a:xfrm>
-          <a:prstGeom prst="rect">
-            <a:avLst/>
-          </a:prstGeom>
-          <a:ln>
-            <a:noFill/>
-          </a:ln>
-          <a:effectLst>
-            <a:outerShdw blurRad="292100" dist="139700" dir="2700000" algn="tl" rotWithShape="0">
-              <a:srgbClr val="333333">
-                <a:alpha val="65000"/>
-              </a:srgbClr>
-            </a:outerShdw>
-          </a:effectLst>
-        </p:spPr>
-      </p:pic>
-      <p:pic>
-        <p:nvPicPr>
-          <p:cNvPr id="3" name="Imagen 2" descr="Icono&#10;&#10;El contenido generado por IA puede ser incorrecto.">
-            <a:extLst>
-              <a:ext uri="{FF2B5EF4-FFF2-40B4-BE49-F238E27FC236}">
-                <a16:creationId xmlns:a16="http://schemas.microsoft.com/office/drawing/2014/main" id="{6A9B57C9-1573-DBD3-FC14-AE20EF3EA83D}"/>
-              </a:ext>
-            </a:extLst>
-          </p:cNvPr>
-          <p:cNvPicPr>
-            <a:picLocks noChangeAspect="1"/>
-          </p:cNvPicPr>
-          <p:nvPr/>
-        </p:nvPicPr>
-        <p:blipFill>
-          <a:blip r:embed="rId4"/>
-          <a:stretch>
-            <a:fillRect/>
-          </a:stretch>
-        </p:blipFill>
-        <p:spPr>
-          <a:xfrm>
-            <a:off x="7764292" y="108352"/>
-            <a:ext cx="1137067" cy="956207"/>
+            <a:off x="35406" y="965536"/>
+            <a:ext cx="7658515" cy="5775923"/>
           </a:xfrm>
           <a:prstGeom prst="rect">
             <a:avLst/>
           </a:prstGeom>
         </p:spPr>
       </p:pic>
-      <p:pic>
-        <p:nvPicPr>
-          <p:cNvPr id="4" name="Picture 2" descr="Eugcom.cl">
-            <a:extLst>
-              <a:ext uri="{FF2B5EF4-FFF2-40B4-BE49-F238E27FC236}">
-                <a16:creationId xmlns:a16="http://schemas.microsoft.com/office/drawing/2014/main" id="{5338FE38-9D51-9BCD-0622-679A5F7255EC}"/>
-              </a:ext>
-            </a:extLst>
-          </p:cNvPr>
-          <p:cNvPicPr>
-            <a:picLocks noChangeAspect="1" noChangeArrowheads="1"/>
-          </p:cNvPicPr>
-          <p:nvPr/>
-        </p:nvPicPr>
-        <p:blipFill>
-          <a:blip r:embed="rId5">
-            <a:extLst>
-              <a:ext uri="{28A0092B-C50C-407E-A947-70E740481C1C}">
-                <a14:useLocalDpi xmlns:a14="http://schemas.microsoft.com/office/drawing/2010/main" val="0"/>
-              </a:ext>
-            </a:extLst>
-          </a:blip>
-          <a:srcRect/>
-          <a:stretch>
-            <a:fillRect/>
-          </a:stretch>
-        </p:blipFill>
-        <p:spPr bwMode="auto">
-          <a:xfrm>
-            <a:off x="102849" y="108353"/>
-            <a:ext cx="577448" cy="577448"/>
-          </a:xfrm>
-          <a:prstGeom prst="rect">
-            <a:avLst/>
-          </a:prstGeom>
-          <a:noFill/>
-          <a:extLst>
-            <a:ext uri="{909E8E84-426E-40DD-AFC4-6F175D3DCCD1}">
-              <a14:hiddenFill xmlns:a14="http://schemas.microsoft.com/office/drawing/2010/main">
-                <a:solidFill>
-                  <a:srgbClr val="FFFFFF"/>
-                </a:solidFill>
-              </a14:hiddenFill>
-            </a:ext>
-          </a:extLst>
-        </p:spPr>
-      </p:pic>
     </p:spTree>
-    <p:extLst>
-      <p:ext uri="{BB962C8B-B14F-4D97-AF65-F5344CB8AC3E}">
-        <p14:creationId xmlns:p14="http://schemas.microsoft.com/office/powerpoint/2010/main" val="157445369"/>
-      </p:ext>
-    </p:extLst>
   </p:cSld>
   <p:clrMapOvr>
     <a:masterClrMapping/>
@@ -9684,7 +9065,7 @@
           <p:cNvPr id="2" name="Título 1">
             <a:extLst>
               <a:ext uri="{FF2B5EF4-FFF2-40B4-BE49-F238E27FC236}">
-                <a16:creationId xmlns:a16="http://schemas.microsoft.com/office/drawing/2014/main" id="{8E4A4D2D-A1BC-861C-7886-0067FFF2B614}"/>
+                <a16:creationId xmlns:a16="http://schemas.microsoft.com/office/drawing/2014/main" id="{DD908331-17C3-4D0E-A3B7-4B0FCF8818DF}"/>
               </a:ext>
             </a:extLst>
           </p:cNvPr>
@@ -9697,8 +9078,8 @@
         </p:nvSpPr>
         <p:spPr>
           <a:xfrm>
-            <a:off x="1990341" y="305817"/>
-            <a:ext cx="3962401" cy="758742"/>
+            <a:off x="609600" y="156237"/>
+            <a:ext cx="6347713" cy="1320800"/>
           </a:xfrm>
         </p:spPr>
         <p:txBody>
@@ -9706,18 +9087,43 @@
           <a:lstStyle/>
           <a:p>
             <a:r>
-              <a:rPr lang="es-CL" b="1" dirty="0"/>
-              <a:t>Tabla de esfuerzo</a:t>
-            </a:r>
+              <a:rPr lang="es-CL" dirty="0"/>
+              <a:t>Sprint Backlog y casos de uso</a:t>
+            </a:r>
+          </a:p>
+        </p:txBody>
+      </p:sp>
+      <p:sp>
+        <p:nvSpPr>
+          <p:cNvPr id="4" name="Marcador de contenido 3">
+            <a:extLst>
+              <a:ext uri="{FF2B5EF4-FFF2-40B4-BE49-F238E27FC236}">
+                <a16:creationId xmlns:a16="http://schemas.microsoft.com/office/drawing/2014/main" id="{404E5BEE-339A-4D85-9973-C6F3773325EA}"/>
+              </a:ext>
+            </a:extLst>
+          </p:cNvPr>
+          <p:cNvSpPr>
+            <a:spLocks noGrp="1"/>
+          </p:cNvSpPr>
+          <p:nvPr>
+            <p:ph idx="1"/>
+          </p:nvPr>
+        </p:nvSpPr>
+        <p:spPr/>
+        <p:txBody>
+          <a:bodyPr/>
+          <a:lstStyle/>
+          <a:p>
+            <a:endParaRPr lang="es-CL" dirty="0"/>
           </a:p>
         </p:txBody>
       </p:sp>
       <p:pic>
         <p:nvPicPr>
-          <p:cNvPr id="6" name="Imagen 5" descr="Icono&#10;&#10;El contenido generado por IA puede ser incorrecto.">
+          <p:cNvPr id="8" name="Imagen 7">
             <a:extLst>
               <a:ext uri="{FF2B5EF4-FFF2-40B4-BE49-F238E27FC236}">
-                <a16:creationId xmlns:a16="http://schemas.microsoft.com/office/drawing/2014/main" id="{0229C12C-E696-0EC6-D066-1A7E8B7079B2}"/>
+                <a16:creationId xmlns:a16="http://schemas.microsoft.com/office/drawing/2014/main" id="{C88F61E2-52EF-4F45-AB0C-C49FA7169BC5}"/>
               </a:ext>
             </a:extLst>
           </p:cNvPr>
@@ -9734,8 +9140,8 @@
         </p:blipFill>
         <p:spPr>
           <a:xfrm>
-            <a:off x="7764292" y="108352"/>
-            <a:ext cx="1137067" cy="956207"/>
+            <a:off x="224118" y="816637"/>
+            <a:ext cx="7395882" cy="4580965"/>
           </a:xfrm>
           <a:prstGeom prst="rect">
             <a:avLst/>
@@ -9744,57 +9150,10 @@
       </p:pic>
       <p:pic>
         <p:nvPicPr>
-          <p:cNvPr id="8" name="Picture 2" descr="Eugcom.cl">
+          <p:cNvPr id="10" name="Imagen 9">
             <a:extLst>
               <a:ext uri="{FF2B5EF4-FFF2-40B4-BE49-F238E27FC236}">
-                <a16:creationId xmlns:a16="http://schemas.microsoft.com/office/drawing/2014/main" id="{78B1BC20-FDE9-0730-F35E-6528A34C3315}"/>
-              </a:ext>
-            </a:extLst>
-          </p:cNvPr>
-          <p:cNvPicPr>
-            <a:picLocks noChangeAspect="1" noChangeArrowheads="1"/>
-          </p:cNvPicPr>
-          <p:nvPr/>
-        </p:nvPicPr>
-        <p:blipFill>
-          <a:blip r:embed="rId3">
-            <a:extLst>
-              <a:ext uri="{28A0092B-C50C-407E-A947-70E740481C1C}">
-                <a14:useLocalDpi xmlns:a14="http://schemas.microsoft.com/office/drawing/2010/main" val="0"/>
-              </a:ext>
-            </a:extLst>
-          </a:blip>
-          <a:srcRect/>
-          <a:stretch>
-            <a:fillRect/>
-          </a:stretch>
-        </p:blipFill>
-        <p:spPr bwMode="auto">
-          <a:xfrm>
-            <a:off x="102849" y="108353"/>
-            <a:ext cx="577448" cy="577448"/>
-          </a:xfrm>
-          <a:prstGeom prst="rect">
-            <a:avLst/>
-          </a:prstGeom>
-          <a:noFill/>
-          <a:extLst>
-            <a:ext uri="{909E8E84-426E-40DD-AFC4-6F175D3DCCD1}">
-              <a14:hiddenFill xmlns:a14="http://schemas.microsoft.com/office/drawing/2010/main">
-                <a:solidFill>
-                  <a:srgbClr val="FFFFFF"/>
-                </a:solidFill>
-              </a14:hiddenFill>
-            </a:ext>
-          </a:extLst>
-        </p:spPr>
-      </p:pic>
-      <p:pic>
-        <p:nvPicPr>
-          <p:cNvPr id="12" name="Imagen 11" descr="Imagen que contiene biombo, edificio, jaula, torre&#10;&#10;El contenido generado por IA puede ser incorrecto.">
-            <a:extLst>
-              <a:ext uri="{FF2B5EF4-FFF2-40B4-BE49-F238E27FC236}">
-                <a16:creationId xmlns:a16="http://schemas.microsoft.com/office/drawing/2014/main" id="{A35D159C-80DE-8D67-8CEB-5E8E2F0B0B96}"/>
+                <a16:creationId xmlns:a16="http://schemas.microsoft.com/office/drawing/2014/main" id="{1BCA2612-A734-48D5-9288-6D3F98284645}"/>
               </a:ext>
             </a:extLst>
           </p:cNvPr>
@@ -9804,115 +9163,25 @@
           <p:nvPr/>
         </p:nvPicPr>
         <p:blipFill>
-          <a:blip r:embed="rId4"/>
+          <a:blip r:embed="rId3"/>
           <a:stretch>
             <a:fillRect/>
           </a:stretch>
         </p:blipFill>
         <p:spPr>
           <a:xfrm>
-            <a:off x="1170432" y="1182534"/>
-            <a:ext cx="6156322" cy="1920719"/>
+            <a:off x="224118" y="5397602"/>
+            <a:ext cx="7395882" cy="1131683"/>
           </a:xfrm>
           <a:prstGeom prst="rect">
             <a:avLst/>
           </a:prstGeom>
-          <a:ln>
-            <a:noFill/>
-          </a:ln>
-          <a:effectLst>
-            <a:outerShdw blurRad="292100" dist="139700" dir="2700000" algn="tl" rotWithShape="0">
-              <a:srgbClr val="333333">
-                <a:alpha val="65000"/>
-              </a:srgbClr>
-            </a:outerShdw>
-          </a:effectLst>
-        </p:spPr>
-      </p:pic>
-      <p:pic>
-        <p:nvPicPr>
-          <p:cNvPr id="13" name="Imagen 12" descr="Imagen que contiene edificio, biombo&#10;&#10;El contenido generado por IA puede ser incorrecto.">
-            <a:extLst>
-              <a:ext uri="{FF2B5EF4-FFF2-40B4-BE49-F238E27FC236}">
-                <a16:creationId xmlns:a16="http://schemas.microsoft.com/office/drawing/2014/main" id="{3DA94CE3-BDA3-13D1-963A-87823BED40EA}"/>
-              </a:ext>
-            </a:extLst>
-          </p:cNvPr>
-          <p:cNvPicPr>
-            <a:picLocks noChangeAspect="1"/>
-          </p:cNvPicPr>
-          <p:nvPr/>
-        </p:nvPicPr>
-        <p:blipFill>
-          <a:blip r:embed="rId5"/>
-          <a:stretch>
-            <a:fillRect/>
-          </a:stretch>
-        </p:blipFill>
-        <p:spPr>
-          <a:xfrm>
-            <a:off x="1170432" y="3103253"/>
-            <a:ext cx="6156322" cy="2086400"/>
-          </a:xfrm>
-          <a:prstGeom prst="rect">
-            <a:avLst/>
-          </a:prstGeom>
-          <a:ln>
-            <a:noFill/>
-          </a:ln>
-          <a:effectLst>
-            <a:outerShdw blurRad="292100" dist="139700" dir="2700000" algn="tl" rotWithShape="0">
-              <a:srgbClr val="333333">
-                <a:alpha val="65000"/>
-              </a:srgbClr>
-            </a:outerShdw>
-          </a:effectLst>
-        </p:spPr>
-      </p:pic>
-      <p:pic>
-        <p:nvPicPr>
-          <p:cNvPr id="14" name="Imagen 13" descr="Imagen que contiene Patrón de fondo&#10;&#10;El contenido generado por IA puede ser incorrecto.">
-            <a:extLst>
-              <a:ext uri="{FF2B5EF4-FFF2-40B4-BE49-F238E27FC236}">
-                <a16:creationId xmlns:a16="http://schemas.microsoft.com/office/drawing/2014/main" id="{F6CC3600-7393-13FB-0D0E-01F2681E01A2}"/>
-              </a:ext>
-            </a:extLst>
-          </p:cNvPr>
-          <p:cNvPicPr>
-            <a:picLocks noChangeAspect="1"/>
-          </p:cNvPicPr>
-          <p:nvPr/>
-        </p:nvPicPr>
-        <p:blipFill>
-          <a:blip r:embed="rId6"/>
-          <a:stretch>
-            <a:fillRect/>
-          </a:stretch>
-        </p:blipFill>
-        <p:spPr>
-          <a:xfrm>
-            <a:off x="1170432" y="5197093"/>
-            <a:ext cx="6156322" cy="1355090"/>
-          </a:xfrm>
-          <a:prstGeom prst="rect">
-            <a:avLst/>
-          </a:prstGeom>
-          <a:ln>
-            <a:noFill/>
-          </a:ln>
-          <a:effectLst>
-            <a:outerShdw blurRad="292100" dist="139700" dir="2700000" algn="tl" rotWithShape="0">
-              <a:srgbClr val="333333">
-                <a:alpha val="65000"/>
-              </a:srgbClr>
-            </a:outerShdw>
-          </a:effectLst>
         </p:spPr>
       </p:pic>
     </p:spTree>
     <p:extLst>
       <p:ext uri="{BB962C8B-B14F-4D97-AF65-F5344CB8AC3E}">
-        <p14:creationId xmlns:p14="http://schemas.microsoft.com/office/powerpoint/2010/main" val="2393607889"/>
+        <p14:creationId xmlns:p14="http://schemas.microsoft.com/office/powerpoint/2010/main" val="157445369"/>
       </p:ext>
     </p:extLst>
   </p:cSld>

--- a/INCREMENTO3/Ppt/PPt Tercer incremento scrum++.pptx
+++ b/INCREMENTO3/Ppt/PPt Tercer incremento scrum++.pptx
@@ -5,7 +5,7 @@
     <p:sldMasterId id="2147483695" r:id="rId1"/>
   </p:sldMasterIdLst>
   <p:notesMasterIdLst>
-    <p:notesMasterId r:id="rId13"/>
+    <p:notesMasterId r:id="rId12"/>
   </p:notesMasterIdLst>
   <p:sldIdLst>
     <p:sldId id="256" r:id="rId2"/>
@@ -16,9 +16,8 @@
     <p:sldId id="273" r:id="rId7"/>
     <p:sldId id="274" r:id="rId8"/>
     <p:sldId id="261" r:id="rId9"/>
-    <p:sldId id="275" r:id="rId10"/>
-    <p:sldId id="266" r:id="rId11"/>
-    <p:sldId id="276" r:id="rId12"/>
+    <p:sldId id="266" r:id="rId10"/>
+    <p:sldId id="276" r:id="rId11"/>
   </p:sldIdLst>
   <p:sldSz cx="9144000" cy="6858000" type="screen4x3"/>
   <p:notesSz cx="6858000" cy="9144000"/>
@@ -6853,194 +6852,6 @@
 </file>
 
 <file path=ppt/slides/slide10.xml><?xml version="1.0" encoding="utf-8"?>
-<p:sld xmlns:a="http://schemas.openxmlformats.org/drawingml/2006/main" xmlns:r="http://schemas.openxmlformats.org/officeDocument/2006/relationships" xmlns:p="http://schemas.openxmlformats.org/presentationml/2006/main">
-  <p:cSld>
-    <p:spTree>
-      <p:nvGrpSpPr>
-        <p:cNvPr id="1" name=""/>
-        <p:cNvGrpSpPr/>
-        <p:nvPr/>
-      </p:nvGrpSpPr>
-      <p:grpSpPr>
-        <a:xfrm>
-          <a:off x="0" y="0"/>
-          <a:ext cx="0" cy="0"/>
-          <a:chOff x="0" y="0"/>
-          <a:chExt cx="0" cy="0"/>
-        </a:xfrm>
-      </p:grpSpPr>
-      <p:pic>
-        <p:nvPicPr>
-          <p:cNvPr id="6146" name="Picture 2" descr="Eugcom.cl">
-            <a:extLst>
-              <a:ext uri="{FF2B5EF4-FFF2-40B4-BE49-F238E27FC236}">
-                <a16:creationId xmlns:a16="http://schemas.microsoft.com/office/drawing/2014/main" id="{0EBB4875-EECF-EB50-E9E8-417DAAA6CE99}"/>
-              </a:ext>
-            </a:extLst>
-          </p:cNvPr>
-          <p:cNvPicPr>
-            <a:picLocks noChangeAspect="1" noChangeArrowheads="1"/>
-          </p:cNvPicPr>
-          <p:nvPr/>
-        </p:nvPicPr>
-        <p:blipFill>
-          <a:blip r:embed="rId2">
-            <a:extLst>
-              <a:ext uri="{28A0092B-C50C-407E-A947-70E740481C1C}">
-                <a14:useLocalDpi xmlns:a14="http://schemas.microsoft.com/office/drawing/2010/main" val="0"/>
-              </a:ext>
-            </a:extLst>
-          </a:blip>
-          <a:srcRect/>
-          <a:stretch>
-            <a:fillRect/>
-          </a:stretch>
-        </p:blipFill>
-        <p:spPr bwMode="auto">
-          <a:xfrm>
-            <a:off x="609599" y="496025"/>
-            <a:ext cx="1137067" cy="1137067"/>
-          </a:xfrm>
-          <a:prstGeom prst="rect">
-            <a:avLst/>
-          </a:prstGeom>
-          <a:noFill/>
-          <a:extLst>
-            <a:ext uri="{909E8E84-426E-40DD-AFC4-6F175D3DCCD1}">
-              <a14:hiddenFill xmlns:a14="http://schemas.microsoft.com/office/drawing/2010/main">
-                <a:solidFill>
-                  <a:srgbClr val="FFFFFF"/>
-                </a:solidFill>
-              </a14:hiddenFill>
-            </a:ext>
-          </a:extLst>
-        </p:spPr>
-      </p:pic>
-      <p:pic>
-        <p:nvPicPr>
-          <p:cNvPr id="2" name="Imagen 1" descr="Icono&#10;&#10;El contenido generado por IA puede ser incorrecto.">
-            <a:extLst>
-              <a:ext uri="{FF2B5EF4-FFF2-40B4-BE49-F238E27FC236}">
-                <a16:creationId xmlns:a16="http://schemas.microsoft.com/office/drawing/2014/main" id="{13A16D1E-B79C-59E6-3509-36C1EF7738C8}"/>
-              </a:ext>
-            </a:extLst>
-          </p:cNvPr>
-          <p:cNvPicPr>
-            <a:picLocks noChangeAspect="1"/>
-          </p:cNvPicPr>
-          <p:nvPr/>
-        </p:nvPicPr>
-        <p:blipFill>
-          <a:blip r:embed="rId3"/>
-          <a:stretch>
-            <a:fillRect/>
-          </a:stretch>
-        </p:blipFill>
-        <p:spPr>
-          <a:xfrm>
-            <a:off x="7764292" y="108352"/>
-            <a:ext cx="1137067" cy="956207"/>
-          </a:xfrm>
-          <a:prstGeom prst="rect">
-            <a:avLst/>
-          </a:prstGeom>
-        </p:spPr>
-      </p:pic>
-      <p:sp>
-        <p:nvSpPr>
-          <p:cNvPr id="3" name="CuadroTexto 2">
-            <a:extLst>
-              <a:ext uri="{FF2B5EF4-FFF2-40B4-BE49-F238E27FC236}">
-                <a16:creationId xmlns:a16="http://schemas.microsoft.com/office/drawing/2014/main" id="{9E2A5CF1-1DFC-01EA-A935-69784121A3B6}"/>
-              </a:ext>
-            </a:extLst>
-          </p:cNvPr>
-          <p:cNvSpPr txBox="1"/>
-          <p:nvPr/>
-        </p:nvSpPr>
-        <p:spPr>
-          <a:xfrm>
-            <a:off x="7693921" y="1064559"/>
-            <a:ext cx="1360046" cy="615553"/>
-          </a:xfrm>
-          <a:prstGeom prst="rect">
-            <a:avLst/>
-          </a:prstGeom>
-          <a:noFill/>
-        </p:spPr>
-        <p:txBody>
-          <a:bodyPr wrap="square" rtlCol="0">
-            <a:spAutoFit/>
-          </a:bodyPr>
-          <a:lstStyle/>
-          <a:p>
-            <a:r>
-              <a:rPr lang="es-CL" sz="800" dirty="0"/>
-              <a:t>Facultad de ingeniería</a:t>
-            </a:r>
-          </a:p>
-          <a:p>
-            <a:r>
-              <a:rPr lang="es-CL" sz="800" dirty="0"/>
-              <a:t>Ingeniería de software I</a:t>
-            </a:r>
-          </a:p>
-          <a:p>
-            <a:endParaRPr lang="es-CL" dirty="0"/>
-          </a:p>
-        </p:txBody>
-      </p:sp>
-      <p:sp>
-        <p:nvSpPr>
-          <p:cNvPr id="4" name="Título 3">
-            <a:extLst>
-              <a:ext uri="{FF2B5EF4-FFF2-40B4-BE49-F238E27FC236}">
-                <a16:creationId xmlns:a16="http://schemas.microsoft.com/office/drawing/2014/main" id="{9B1E5721-C00A-0D24-A767-89FFED888A1F}"/>
-              </a:ext>
-            </a:extLst>
-          </p:cNvPr>
-          <p:cNvSpPr>
-            <a:spLocks noGrp="1"/>
-          </p:cNvSpPr>
-          <p:nvPr>
-            <p:ph type="title"/>
-          </p:nvPr>
-        </p:nvSpPr>
-        <p:spPr>
-          <a:xfrm>
-            <a:off x="609599" y="3297936"/>
-            <a:ext cx="6347714" cy="1320800"/>
-          </a:xfrm>
-        </p:spPr>
-        <p:txBody>
-          <a:bodyPr/>
-          <a:lstStyle/>
-          <a:p>
-            <a:r>
-              <a:rPr lang="en-US" dirty="0"/>
-              <a:t>A Continuaci</a:t>
-            </a:r>
-            <a:r>
-              <a:rPr lang="es-CL" dirty="0"/>
-              <a:t>ó</a:t>
-            </a:r>
-            <a:r>
-              <a:rPr lang="en-US" dirty="0"/>
-              <a:t>n una Demo…</a:t>
-            </a:r>
-            <a:endParaRPr lang="es-419" dirty="0"/>
-          </a:p>
-        </p:txBody>
-      </p:sp>
-    </p:spTree>
-  </p:cSld>
-  <p:clrMapOvr>
-    <a:masterClrMapping/>
-  </p:clrMapOvr>
-</p:sld>
-</file>
-
-<file path=ppt/slides/slide11.xml><?xml version="1.0" encoding="utf-8"?>
 <p:sld xmlns:a="http://schemas.openxmlformats.org/drawingml/2006/main" xmlns:r="http://schemas.openxmlformats.org/officeDocument/2006/relationships" xmlns:p="http://schemas.openxmlformats.org/presentationml/2006/main">
   <p:cSld>
     <p:spTree>
@@ -9007,10 +8818,10 @@
       </p:sp>
       <p:pic>
         <p:nvPicPr>
-          <p:cNvPr id="4" name="Imagen 3">
+          <p:cNvPr id="5" name="Imagen 4">
             <a:extLst>
               <a:ext uri="{FF2B5EF4-FFF2-40B4-BE49-F238E27FC236}">
-                <a16:creationId xmlns:a16="http://schemas.microsoft.com/office/drawing/2014/main" id="{89F14EA6-43DC-4209-9871-7A77C454F150}"/>
+                <a16:creationId xmlns:a16="http://schemas.microsoft.com/office/drawing/2014/main" id="{BDEF45D2-F0CB-434B-AD77-CFD950FF1BA1}"/>
               </a:ext>
             </a:extLst>
           </p:cNvPr>
@@ -9027,8 +8838,8 @@
         </p:blipFill>
         <p:spPr>
           <a:xfrm>
-            <a:off x="35406" y="965536"/>
-            <a:ext cx="7658515" cy="5775923"/>
+            <a:off x="253553" y="1963860"/>
+            <a:ext cx="8206631" cy="2635034"/>
           </a:xfrm>
           <a:prstGeom prst="rect">
             <a:avLst/>
@@ -9060,100 +8871,59 @@
           <a:chExt cx="0" cy="0"/>
         </a:xfrm>
       </p:grpSpPr>
-      <p:sp>
-        <p:nvSpPr>
-          <p:cNvPr id="2" name="Título 1">
+      <p:pic>
+        <p:nvPicPr>
+          <p:cNvPr id="6146" name="Picture 2" descr="Eugcom.cl">
             <a:extLst>
               <a:ext uri="{FF2B5EF4-FFF2-40B4-BE49-F238E27FC236}">
-                <a16:creationId xmlns:a16="http://schemas.microsoft.com/office/drawing/2014/main" id="{DD908331-17C3-4D0E-A3B7-4B0FCF8818DF}"/>
-              </a:ext>
-            </a:extLst>
-          </p:cNvPr>
-          <p:cNvSpPr>
-            <a:spLocks noGrp="1"/>
-          </p:cNvSpPr>
-          <p:nvPr>
-            <p:ph type="title"/>
-          </p:nvPr>
-        </p:nvSpPr>
-        <p:spPr>
-          <a:xfrm>
-            <a:off x="609600" y="156237"/>
-            <a:ext cx="6347713" cy="1320800"/>
-          </a:xfrm>
-        </p:spPr>
-        <p:txBody>
-          <a:bodyPr/>
-          <a:lstStyle/>
-          <a:p>
-            <a:r>
-              <a:rPr lang="es-CL" dirty="0"/>
-              <a:t>Sprint Backlog y casos de uso</a:t>
-            </a:r>
-          </a:p>
-        </p:txBody>
-      </p:sp>
-      <p:sp>
-        <p:nvSpPr>
-          <p:cNvPr id="4" name="Marcador de contenido 3">
-            <a:extLst>
-              <a:ext uri="{FF2B5EF4-FFF2-40B4-BE49-F238E27FC236}">
-                <a16:creationId xmlns:a16="http://schemas.microsoft.com/office/drawing/2014/main" id="{404E5BEE-339A-4D85-9973-C6F3773325EA}"/>
-              </a:ext>
-            </a:extLst>
-          </p:cNvPr>
-          <p:cNvSpPr>
-            <a:spLocks noGrp="1"/>
-          </p:cNvSpPr>
-          <p:nvPr>
-            <p:ph idx="1"/>
-          </p:nvPr>
-        </p:nvSpPr>
-        <p:spPr/>
-        <p:txBody>
-          <a:bodyPr/>
-          <a:lstStyle/>
-          <a:p>
-            <a:endParaRPr lang="es-CL" dirty="0"/>
-          </a:p>
-        </p:txBody>
-      </p:sp>
-      <p:pic>
-        <p:nvPicPr>
-          <p:cNvPr id="8" name="Imagen 7">
-            <a:extLst>
-              <a:ext uri="{FF2B5EF4-FFF2-40B4-BE49-F238E27FC236}">
-                <a16:creationId xmlns:a16="http://schemas.microsoft.com/office/drawing/2014/main" id="{C88F61E2-52EF-4F45-AB0C-C49FA7169BC5}"/>
+                <a16:creationId xmlns:a16="http://schemas.microsoft.com/office/drawing/2014/main" id="{0EBB4875-EECF-EB50-E9E8-417DAAA6CE99}"/>
               </a:ext>
             </a:extLst>
           </p:cNvPr>
           <p:cNvPicPr>
-            <a:picLocks noChangeAspect="1"/>
+            <a:picLocks noChangeAspect="1" noChangeArrowheads="1"/>
           </p:cNvPicPr>
           <p:nvPr/>
         </p:nvPicPr>
         <p:blipFill>
-          <a:blip r:embed="rId2"/>
+          <a:blip r:embed="rId2">
+            <a:extLst>
+              <a:ext uri="{28A0092B-C50C-407E-A947-70E740481C1C}">
+                <a14:useLocalDpi xmlns:a14="http://schemas.microsoft.com/office/drawing/2010/main" val="0"/>
+              </a:ext>
+            </a:extLst>
+          </a:blip>
+          <a:srcRect/>
           <a:stretch>
             <a:fillRect/>
           </a:stretch>
         </p:blipFill>
-        <p:spPr>
+        <p:spPr bwMode="auto">
           <a:xfrm>
-            <a:off x="224118" y="816637"/>
-            <a:ext cx="7395882" cy="4580965"/>
+            <a:off x="609599" y="496025"/>
+            <a:ext cx="1137067" cy="1137067"/>
           </a:xfrm>
           <a:prstGeom prst="rect">
             <a:avLst/>
           </a:prstGeom>
+          <a:noFill/>
+          <a:extLst>
+            <a:ext uri="{909E8E84-426E-40DD-AFC4-6F175D3DCCD1}">
+              <a14:hiddenFill xmlns:a14="http://schemas.microsoft.com/office/drawing/2010/main">
+                <a:solidFill>
+                  <a:srgbClr val="FFFFFF"/>
+                </a:solidFill>
+              </a14:hiddenFill>
+            </a:ext>
+          </a:extLst>
         </p:spPr>
       </p:pic>
       <p:pic>
         <p:nvPicPr>
-          <p:cNvPr id="10" name="Imagen 9">
+          <p:cNvPr id="2" name="Imagen 1" descr="Icono&#10;&#10;El contenido generado por IA puede ser incorrecto.">
             <a:extLst>
               <a:ext uri="{FF2B5EF4-FFF2-40B4-BE49-F238E27FC236}">
-                <a16:creationId xmlns:a16="http://schemas.microsoft.com/office/drawing/2014/main" id="{1BCA2612-A734-48D5-9288-6D3F98284645}"/>
+                <a16:creationId xmlns:a16="http://schemas.microsoft.com/office/drawing/2014/main" id="{13A16D1E-B79C-59E6-3509-36C1EF7738C8}"/>
               </a:ext>
             </a:extLst>
           </p:cNvPr>
@@ -9170,20 +8940,101 @@
         </p:blipFill>
         <p:spPr>
           <a:xfrm>
-            <a:off x="224118" y="5397602"/>
-            <a:ext cx="7395882" cy="1131683"/>
+            <a:off x="7764292" y="108352"/>
+            <a:ext cx="1137067" cy="956207"/>
           </a:xfrm>
           <a:prstGeom prst="rect">
             <a:avLst/>
           </a:prstGeom>
         </p:spPr>
       </p:pic>
+      <p:sp>
+        <p:nvSpPr>
+          <p:cNvPr id="3" name="CuadroTexto 2">
+            <a:extLst>
+              <a:ext uri="{FF2B5EF4-FFF2-40B4-BE49-F238E27FC236}">
+                <a16:creationId xmlns:a16="http://schemas.microsoft.com/office/drawing/2014/main" id="{9E2A5CF1-1DFC-01EA-A935-69784121A3B6}"/>
+              </a:ext>
+            </a:extLst>
+          </p:cNvPr>
+          <p:cNvSpPr txBox="1"/>
+          <p:nvPr/>
+        </p:nvSpPr>
+        <p:spPr>
+          <a:xfrm>
+            <a:off x="7693921" y="1064559"/>
+            <a:ext cx="1360046" cy="615553"/>
+          </a:xfrm>
+          <a:prstGeom prst="rect">
+            <a:avLst/>
+          </a:prstGeom>
+          <a:noFill/>
+        </p:spPr>
+        <p:txBody>
+          <a:bodyPr wrap="square" rtlCol="0">
+            <a:spAutoFit/>
+          </a:bodyPr>
+          <a:lstStyle/>
+          <a:p>
+            <a:r>
+              <a:rPr lang="es-CL" sz="800" dirty="0"/>
+              <a:t>Facultad de ingeniería</a:t>
+            </a:r>
+          </a:p>
+          <a:p>
+            <a:r>
+              <a:rPr lang="es-CL" sz="800" dirty="0"/>
+              <a:t>Ingeniería de software I</a:t>
+            </a:r>
+          </a:p>
+          <a:p>
+            <a:endParaRPr lang="es-CL" dirty="0"/>
+          </a:p>
+        </p:txBody>
+      </p:sp>
+      <p:sp>
+        <p:nvSpPr>
+          <p:cNvPr id="4" name="Título 3">
+            <a:extLst>
+              <a:ext uri="{FF2B5EF4-FFF2-40B4-BE49-F238E27FC236}">
+                <a16:creationId xmlns:a16="http://schemas.microsoft.com/office/drawing/2014/main" id="{9B1E5721-C00A-0D24-A767-89FFED888A1F}"/>
+              </a:ext>
+            </a:extLst>
+          </p:cNvPr>
+          <p:cNvSpPr>
+            <a:spLocks noGrp="1"/>
+          </p:cNvSpPr>
+          <p:nvPr>
+            <p:ph type="title"/>
+          </p:nvPr>
+        </p:nvSpPr>
+        <p:spPr>
+          <a:xfrm>
+            <a:off x="609599" y="3297936"/>
+            <a:ext cx="6347714" cy="1320800"/>
+          </a:xfrm>
+        </p:spPr>
+        <p:txBody>
+          <a:bodyPr/>
+          <a:lstStyle/>
+          <a:p>
+            <a:r>
+              <a:rPr lang="en-US" dirty="0"/>
+              <a:t>A Continuaci</a:t>
+            </a:r>
+            <a:r>
+              <a:rPr lang="es-CL" dirty="0"/>
+              <a:t>ó</a:t>
+            </a:r>
+            <a:r>
+              <a:rPr lang="en-US" dirty="0"/>
+              <a:t>n una Demo…</a:t>
+            </a:r>
+            <a:endParaRPr lang="es-419" dirty="0"/>
+          </a:p>
+        </p:txBody>
+      </p:sp>
     </p:spTree>
-    <p:extLst>
-      <p:ext uri="{BB962C8B-B14F-4D97-AF65-F5344CB8AC3E}">
-        <p14:creationId xmlns:p14="http://schemas.microsoft.com/office/powerpoint/2010/main" val="157445369"/>
-      </p:ext>
-    </p:extLst>
   </p:cSld>
   <p:clrMapOvr>
     <a:masterClrMapping/>

--- a/INCREMENTO3/Ppt/PPt Tercer incremento scrum++.pptx
+++ b/INCREMENTO3/Ppt/PPt Tercer incremento scrum++.pptx
@@ -217,7 +217,7 @@
           <a:p>
             <a:fld id="{56824AA8-F311-4ABC-8748-4A852C5A6ECD}" type="datetimeFigureOut">
               <a:rPr lang="es-419" smtClean="0"/>
-              <a:t>24/10/2025</a:t>
+              <a:t>26/10/2025</a:t>
             </a:fld>
             <a:endParaRPr lang="es-419"/>
           </a:p>
@@ -1363,7 +1363,7 @@
           <a:p>
             <a:fld id="{5BCAD085-E8A6-8845-BD4E-CB4CCA059FC4}" type="datetimeFigureOut">
               <a:rPr lang="en-US" smtClean="0"/>
-              <a:t>10/24/2025</a:t>
+              <a:t>10/26/2025</a:t>
             </a:fld>
             <a:endParaRPr lang="en-US"/>
           </a:p>
@@ -1614,7 +1614,7 @@
           <a:p>
             <a:fld id="{5BCAD085-E8A6-8845-BD4E-CB4CCA059FC4}" type="datetimeFigureOut">
               <a:rPr lang="en-US" smtClean="0"/>
-              <a:t>10/24/2025</a:t>
+              <a:t>10/26/2025</a:t>
             </a:fld>
             <a:endParaRPr lang="en-US"/>
           </a:p>
@@ -1928,7 +1928,7 @@
           <a:p>
             <a:fld id="{5BCAD085-E8A6-8845-BD4E-CB4CCA059FC4}" type="datetimeFigureOut">
               <a:rPr lang="en-US" smtClean="0"/>
-              <a:t>10/24/2025</a:t>
+              <a:t>10/26/2025</a:t>
             </a:fld>
             <a:endParaRPr lang="en-US"/>
           </a:p>
@@ -2261,7 +2261,7 @@
           <a:p>
             <a:fld id="{5BCAD085-E8A6-8845-BD4E-CB4CCA059FC4}" type="datetimeFigureOut">
               <a:rPr lang="en-US" smtClean="0"/>
-              <a:t>10/24/2025</a:t>
+              <a:t>10/26/2025</a:t>
             </a:fld>
             <a:endParaRPr lang="en-US"/>
           </a:p>
@@ -2575,7 +2575,7 @@
           <a:p>
             <a:fld id="{5BCAD085-E8A6-8845-BD4E-CB4CCA059FC4}" type="datetimeFigureOut">
               <a:rPr lang="en-US" smtClean="0"/>
-              <a:t>10/24/2025</a:t>
+              <a:t>10/26/2025</a:t>
             </a:fld>
             <a:endParaRPr lang="en-US"/>
           </a:p>
@@ -2968,7 +2968,7 @@
           <a:p>
             <a:fld id="{5BCAD085-E8A6-8845-BD4E-CB4CCA059FC4}" type="datetimeFigureOut">
               <a:rPr lang="en-US" smtClean="0"/>
-              <a:t>10/24/2025</a:t>
+              <a:t>10/26/2025</a:t>
             </a:fld>
             <a:endParaRPr lang="en-US"/>
           </a:p>
@@ -3138,7 +3138,7 @@
           <a:p>
             <a:fld id="{5BCAD085-E8A6-8845-BD4E-CB4CCA059FC4}" type="datetimeFigureOut">
               <a:rPr lang="en-US" smtClean="0"/>
-              <a:t>10/24/2025</a:t>
+              <a:t>10/26/2025</a:t>
             </a:fld>
             <a:endParaRPr lang="en-US"/>
           </a:p>
@@ -3318,7 +3318,7 @@
           <a:p>
             <a:fld id="{5BCAD085-E8A6-8845-BD4E-CB4CCA059FC4}" type="datetimeFigureOut">
               <a:rPr lang="en-US" smtClean="0"/>
-              <a:t>10/24/2025</a:t>
+              <a:t>10/26/2025</a:t>
             </a:fld>
             <a:endParaRPr lang="en-US"/>
           </a:p>
@@ -3488,7 +3488,7 @@
           <a:p>
             <a:fld id="{5BCAD085-E8A6-8845-BD4E-CB4CCA059FC4}" type="datetimeFigureOut">
               <a:rPr lang="en-US" smtClean="0"/>
-              <a:t>10/24/2025</a:t>
+              <a:t>10/26/2025</a:t>
             </a:fld>
             <a:endParaRPr lang="en-US"/>
           </a:p>
@@ -3735,7 +3735,7 @@
           <a:p>
             <a:fld id="{5BCAD085-E8A6-8845-BD4E-CB4CCA059FC4}" type="datetimeFigureOut">
               <a:rPr lang="en-US" smtClean="0"/>
-              <a:t>10/24/2025</a:t>
+              <a:t>10/26/2025</a:t>
             </a:fld>
             <a:endParaRPr lang="en-US"/>
           </a:p>
@@ -4032,7 +4032,7 @@
           <a:p>
             <a:fld id="{5BCAD085-E8A6-8845-BD4E-CB4CCA059FC4}" type="datetimeFigureOut">
               <a:rPr lang="en-US" smtClean="0"/>
-              <a:t>10/24/2025</a:t>
+              <a:t>10/26/2025</a:t>
             </a:fld>
             <a:endParaRPr lang="en-US"/>
           </a:p>
@@ -4411,7 +4411,7 @@
           <a:p>
             <a:fld id="{5BCAD085-E8A6-8845-BD4E-CB4CCA059FC4}" type="datetimeFigureOut">
               <a:rPr lang="en-US" smtClean="0"/>
-              <a:t>10/24/2025</a:t>
+              <a:t>10/26/2025</a:t>
             </a:fld>
             <a:endParaRPr lang="en-US"/>
           </a:p>
@@ -4534,7 +4534,7 @@
           <a:p>
             <a:fld id="{5BCAD085-E8A6-8845-BD4E-CB4CCA059FC4}" type="datetimeFigureOut">
               <a:rPr lang="en-US" smtClean="0"/>
-              <a:t>10/24/2025</a:t>
+              <a:t>10/26/2025</a:t>
             </a:fld>
             <a:endParaRPr lang="en-US"/>
           </a:p>
@@ -4629,7 +4629,7 @@
           <a:p>
             <a:fld id="{5BCAD085-E8A6-8845-BD4E-CB4CCA059FC4}" type="datetimeFigureOut">
               <a:rPr lang="en-US" smtClean="0"/>
-              <a:t>10/24/2025</a:t>
+              <a:t>10/26/2025</a:t>
             </a:fld>
             <a:endParaRPr lang="en-US"/>
           </a:p>
@@ -4884,7 +4884,7 @@
           <a:p>
             <a:fld id="{5BCAD085-E8A6-8845-BD4E-CB4CCA059FC4}" type="datetimeFigureOut">
               <a:rPr lang="en-US" smtClean="0"/>
-              <a:t>10/24/2025</a:t>
+              <a:t>10/26/2025</a:t>
             </a:fld>
             <a:endParaRPr lang="en-US"/>
           </a:p>
@@ -5147,7 +5147,7 @@
           <a:p>
             <a:fld id="{5BCAD085-E8A6-8845-BD4E-CB4CCA059FC4}" type="datetimeFigureOut">
               <a:rPr lang="en-US" smtClean="0"/>
-              <a:t>10/24/2025</a:t>
+              <a:t>10/26/2025</a:t>
             </a:fld>
             <a:endParaRPr lang="en-US"/>
           </a:p>
@@ -5305,6 +5305,13 @@
               <a:schemeClr val="lt1"/>
             </a:fontRef>
           </p:style>
+          <p:txBody>
+            <a:bodyPr/>
+            <a:lstStyle/>
+            <a:p>
+              <a:endParaRPr lang="es-CL"/>
+            </a:p>
+          </p:txBody>
         </p:sp>
         <p:cxnSp>
           <p:nvCxnSpPr>
@@ -5444,6 +5451,13 @@
               <a:schemeClr val="lt1"/>
             </a:fontRef>
           </p:style>
+          <p:txBody>
+            <a:bodyPr/>
+            <a:lstStyle/>
+            <a:p>
+              <a:endParaRPr lang="es-CL"/>
+            </a:p>
+          </p:txBody>
         </p:sp>
         <p:sp>
           <p:nvSpPr>
@@ -5509,6 +5523,13 @@
               <a:schemeClr val="lt1"/>
             </a:fontRef>
           </p:style>
+          <p:txBody>
+            <a:bodyPr/>
+            <a:lstStyle/>
+            <a:p>
+              <a:endParaRPr lang="es-CL"/>
+            </a:p>
+          </p:txBody>
         </p:sp>
         <p:sp>
           <p:nvSpPr>
@@ -5571,6 +5592,13 @@
               <a:schemeClr val="lt1"/>
             </a:fontRef>
           </p:style>
+          <p:txBody>
+            <a:bodyPr/>
+            <a:lstStyle/>
+            <a:p>
+              <a:endParaRPr lang="es-CL"/>
+            </a:p>
+          </p:txBody>
         </p:sp>
         <p:sp>
           <p:nvSpPr>
@@ -5635,6 +5663,13 @@
               <a:schemeClr val="lt1"/>
             </a:fontRef>
           </p:style>
+          <p:txBody>
+            <a:bodyPr/>
+            <a:lstStyle/>
+            <a:p>
+              <a:endParaRPr lang="es-CL"/>
+            </a:p>
+          </p:txBody>
         </p:sp>
         <p:sp>
           <p:nvSpPr>
@@ -5702,6 +5737,13 @@
               <a:schemeClr val="lt1"/>
             </a:fontRef>
           </p:style>
+          <p:txBody>
+            <a:bodyPr/>
+            <a:lstStyle/>
+            <a:p>
+              <a:endParaRPr lang="es-CL"/>
+            </a:p>
+          </p:txBody>
         </p:sp>
         <p:sp>
           <p:nvSpPr>
@@ -5767,6 +5809,13 @@
               <a:schemeClr val="lt1"/>
             </a:fontRef>
           </p:style>
+          <p:txBody>
+            <a:bodyPr/>
+            <a:lstStyle/>
+            <a:p>
+              <a:endParaRPr lang="es-CL"/>
+            </a:p>
+          </p:txBody>
         </p:sp>
         <p:sp>
           <p:nvSpPr>
@@ -5829,6 +5878,13 @@
               <a:schemeClr val="lt1"/>
             </a:fontRef>
           </p:style>
+          <p:txBody>
+            <a:bodyPr/>
+            <a:lstStyle/>
+            <a:p>
+              <a:endParaRPr lang="es-CL"/>
+            </a:p>
+          </p:txBody>
         </p:sp>
       </p:grpSp>
       <p:sp>
@@ -5961,7 +6017,7 @@
           <a:p>
             <a:fld id="{5BCAD085-E8A6-8845-BD4E-CB4CCA059FC4}" type="datetimeFigureOut">
               <a:rPr lang="en-US" smtClean="0"/>
-              <a:t>10/24/2025</a:t>
+              <a:t>10/26/2025</a:t>
             </a:fld>
             <a:endParaRPr lang="en-US"/>
           </a:p>
@@ -6508,7 +6564,7 @@
                 <a:latin typeface="Times New Roman" panose="02020603050405020304" pitchFamily="18" charset="0"/>
                 <a:cs typeface="Times New Roman" panose="02020603050405020304" pitchFamily="18" charset="0"/>
               </a:rPr>
-              <a:t>PROYECTO INGENIERÍA DE SOFTWARE SEGUNDO INCREMENTO PARA EL SISTEMA BIOMÉTRICO WEB EUGCOM</a:t>
+              <a:t>PROYECTO INGENIERÍA DE SOFTWARE TERCER INCREMENTO PARA EL SISTEMA BIOMÉTRICO WEB EUGCOM</a:t>
             </a:r>
             <a:endParaRPr lang="es-CL" sz="2000" dirty="0">
               <a:latin typeface="Times New Roman" panose="02020603050405020304" pitchFamily="18" charset="0"/>
@@ -7478,7 +7534,7 @@
           <a:p>
             <a:r>
               <a:rPr lang="es-CL" dirty="0"/>
-              <a:t>65</a:t>
+              <a:t>4</a:t>
             </a:r>
             <a:r>
               <a:rPr dirty="0"/>
@@ -7521,7 +7577,7 @@
             </a:r>
             <a:r>
               <a:rPr lang="es-CL" dirty="0"/>
-              <a:t>100</a:t>
+              <a:t>97</a:t>
             </a:r>
             <a:r>
               <a:rPr dirty="0"/>
@@ -7651,6 +7707,94 @@
           </a:p>
         </p:txBody>
       </p:sp>
+      <p:pic>
+        <p:nvPicPr>
+          <p:cNvPr id="6" name="Imagen 5" descr="Gráfico, Gráfico de barras, Histograma&#10;&#10;El contenido generado por IA puede ser incorrecto.">
+            <a:extLst>
+              <a:ext uri="{FF2B5EF4-FFF2-40B4-BE49-F238E27FC236}">
+                <a16:creationId xmlns:a16="http://schemas.microsoft.com/office/drawing/2014/main" id="{1B20F5EC-E599-5EDB-2EB2-6E17C05E072A}"/>
+              </a:ext>
+            </a:extLst>
+          </p:cNvPr>
+          <p:cNvPicPr>
+            <a:picLocks noChangeAspect="1"/>
+          </p:cNvPicPr>
+          <p:nvPr/>
+        </p:nvPicPr>
+        <p:blipFill>
+          <a:blip r:embed="rId4"/>
+          <a:stretch>
+            <a:fillRect/>
+          </a:stretch>
+        </p:blipFill>
+        <p:spPr>
+          <a:xfrm>
+            <a:off x="609599" y="3611593"/>
+            <a:ext cx="3191871" cy="2822663"/>
+          </a:xfrm>
+          <a:prstGeom prst="rect">
+            <a:avLst/>
+          </a:prstGeom>
+          <a:ln w="38100" cap="sq">
+            <a:solidFill>
+              <a:srgbClr val="000000"/>
+            </a:solidFill>
+            <a:prstDash val="solid"/>
+            <a:miter lim="800000"/>
+          </a:ln>
+          <a:effectLst>
+            <a:outerShdw blurRad="50800" dist="38100" dir="2700000" algn="tl" rotWithShape="0">
+              <a:srgbClr val="000000">
+                <a:alpha val="43000"/>
+              </a:srgbClr>
+            </a:outerShdw>
+          </a:effectLst>
+        </p:spPr>
+      </p:pic>
+      <p:pic>
+        <p:nvPicPr>
+          <p:cNvPr id="7" name="Imagen 6" descr="Gráfico, Gráfico circular&#10;&#10;El contenido generado por IA puede ser incorrecto.">
+            <a:extLst>
+              <a:ext uri="{FF2B5EF4-FFF2-40B4-BE49-F238E27FC236}">
+                <a16:creationId xmlns:a16="http://schemas.microsoft.com/office/drawing/2014/main" id="{66652064-34CB-6169-3E2B-0308C5E5C8B9}"/>
+              </a:ext>
+            </a:extLst>
+          </p:cNvPr>
+          <p:cNvPicPr>
+            <a:picLocks noChangeAspect="1"/>
+          </p:cNvPicPr>
+          <p:nvPr/>
+        </p:nvPicPr>
+        <p:blipFill>
+          <a:blip r:embed="rId5"/>
+          <a:stretch>
+            <a:fillRect/>
+          </a:stretch>
+        </p:blipFill>
+        <p:spPr>
+          <a:xfrm>
+            <a:off x="4459350" y="3659190"/>
+            <a:ext cx="2616456" cy="2802544"/>
+          </a:xfrm>
+          <a:prstGeom prst="rect">
+            <a:avLst/>
+          </a:prstGeom>
+          <a:ln w="38100" cap="sq">
+            <a:solidFill>
+              <a:srgbClr val="000000"/>
+            </a:solidFill>
+            <a:prstDash val="solid"/>
+            <a:miter lim="800000"/>
+          </a:ln>
+          <a:effectLst>
+            <a:outerShdw blurRad="50800" dist="38100" dir="2700000" algn="tl" rotWithShape="0">
+              <a:srgbClr val="000000">
+                <a:alpha val="43000"/>
+              </a:srgbClr>
+            </a:outerShdw>
+          </a:effectLst>
+        </p:spPr>
+      </p:pic>
     </p:spTree>
   </p:cSld>
   <p:clrMapOvr>

--- a/INCREMENTO3/Ppt/PPt Tercer incremento scrum++.pptx
+++ b/INCREMENTO3/Ppt/PPt Tercer incremento scrum++.pptx
@@ -12,10 +12,10 @@
     <p:sldId id="267" r:id="rId3"/>
     <p:sldId id="257" r:id="rId4"/>
     <p:sldId id="259" r:id="rId5"/>
-    <p:sldId id="272" r:id="rId6"/>
-    <p:sldId id="273" r:id="rId7"/>
-    <p:sldId id="274" r:id="rId8"/>
-    <p:sldId id="261" r:id="rId9"/>
+    <p:sldId id="273" r:id="rId6"/>
+    <p:sldId id="274" r:id="rId7"/>
+    <p:sldId id="278" r:id="rId8"/>
+    <p:sldId id="277" r:id="rId9"/>
     <p:sldId id="266" r:id="rId10"/>
     <p:sldId id="276" r:id="rId11"/>
   </p:sldIdLst>
@@ -6551,7 +6551,12 @@
             <p:ph type="title"/>
           </p:nvPr>
         </p:nvSpPr>
-        <p:spPr/>
+        <p:spPr>
+          <a:xfrm>
+            <a:off x="953016" y="1833952"/>
+            <a:ext cx="6347713" cy="1320800"/>
+          </a:xfrm>
+        </p:spPr>
         <p:txBody>
           <a:bodyPr>
             <a:noAutofit/>
@@ -6560,14 +6565,14 @@
           <a:p>
             <a:pPr algn="ctr"/>
             <a:r>
-              <a:rPr lang="es-CL" sz="2000" b="1" dirty="0">
-                <a:latin typeface="Times New Roman" panose="02020603050405020304" pitchFamily="18" charset="0"/>
+              <a:rPr lang="es-CL" sz="2400" b="1" dirty="0">
+                <a:latin typeface="Trebuchet MS (Títulos)"/>
                 <a:cs typeface="Times New Roman" panose="02020603050405020304" pitchFamily="18" charset="0"/>
               </a:rPr>
               <a:t>PROYECTO INGENIERÍA DE SOFTWARE TERCER INCREMENTO PARA EL SISTEMA BIOMÉTRICO WEB EUGCOM</a:t>
             </a:r>
-            <a:endParaRPr lang="es-CL" sz="2000" dirty="0">
-              <a:latin typeface="Times New Roman" panose="02020603050405020304" pitchFamily="18" charset="0"/>
+            <a:endParaRPr lang="es-CL" sz="2400" dirty="0">
+              <a:latin typeface="Trebuchet MS (Títulos)"/>
               <a:cs typeface="Times New Roman" panose="02020603050405020304" pitchFamily="18" charset="0"/>
             </a:endParaRPr>
           </a:p>
@@ -6585,17 +6590,17 @@
         </p:nvSpPr>
         <p:spPr>
           <a:xfrm>
-            <a:off x="816232" y="2905271"/>
-            <a:ext cx="6347714" cy="3880773"/>
+            <a:off x="816233" y="3225120"/>
+            <a:ext cx="6347714" cy="3448484"/>
           </a:xfrm>
         </p:spPr>
         <p:txBody>
           <a:bodyPr>
-            <a:normAutofit/>
+            <a:normAutofit fontScale="92500" lnSpcReduction="10000"/>
           </a:bodyPr>
           <a:lstStyle/>
           <a:p>
-            <a:pPr marL="0" indent="0">
+            <a:pPr marL="0" indent="0" algn="ctr">
               <a:buNone/>
             </a:pPr>
             <a:r>
@@ -6607,7 +6612,7 @@
             </a:r>
           </a:p>
           <a:p>
-            <a:pPr marL="0" indent="0">
+            <a:pPr marL="0" indent="0" algn="ctr">
               <a:buNone/>
             </a:pPr>
             <a:r>
@@ -6619,7 +6624,7 @@
             </a:r>
           </a:p>
           <a:p>
-            <a:pPr marL="0" indent="0">
+            <a:pPr marL="0" indent="0" algn="ctr">
               <a:buNone/>
             </a:pPr>
             <a:r>
@@ -6631,7 +6636,7 @@
             </a:r>
           </a:p>
           <a:p>
-            <a:pPr marL="0" indent="0">
+            <a:pPr marL="0" indent="0" algn="ctr">
               <a:buNone/>
             </a:pPr>
             <a:r>
@@ -6643,7 +6648,7 @@
             </a:r>
           </a:p>
           <a:p>
-            <a:pPr marL="0" indent="0">
+            <a:pPr marL="0" indent="0" algn="ctr">
               <a:buNone/>
             </a:pPr>
             <a:r>
@@ -6655,7 +6660,7 @@
             </a:r>
           </a:p>
           <a:p>
-            <a:pPr marL="0" indent="0">
+            <a:pPr marL="0" indent="0" algn="ctr">
               <a:buNone/>
             </a:pPr>
             <a:r>
@@ -6667,7 +6672,7 @@
             </a:r>
           </a:p>
           <a:p>
-            <a:pPr marL="0" indent="0">
+            <a:pPr marL="0" indent="0" algn="ctr">
               <a:buNone/>
             </a:pPr>
             <a:r>
@@ -6679,7 +6684,7 @@
             </a:r>
           </a:p>
           <a:p>
-            <a:pPr marL="0" indent="0">
+            <a:pPr marL="0" indent="0" algn="ctr">
               <a:buNone/>
             </a:pPr>
             <a:endParaRPr lang="es-CL" sz="1100" dirty="0">
@@ -6688,7 +6693,7 @@
             </a:endParaRPr>
           </a:p>
           <a:p>
-            <a:pPr marL="0" indent="0">
+            <a:pPr marL="0" indent="0" algn="ctr">
               <a:buNone/>
             </a:pPr>
             <a:r>
@@ -6711,7 +6716,7 @@
             </a:endParaRPr>
           </a:p>
           <a:p>
-            <a:pPr marL="0" indent="0">
+            <a:pPr marL="0" indent="0" algn="ctr">
               <a:buNone/>
             </a:pPr>
             <a:r>
@@ -6737,7 +6742,7 @@
             </a:r>
           </a:p>
           <a:p>
-            <a:pPr marL="0" indent="0">
+            <a:pPr marL="0" indent="0" algn="ctr">
               <a:buNone/>
             </a:pPr>
             <a:endParaRPr lang="es-ES" sz="1100" dirty="0">
@@ -6746,7 +6751,7 @@
             </a:endParaRPr>
           </a:p>
           <a:p>
-            <a:pPr marL="0" indent="0">
+            <a:pPr marL="0" indent="0" algn="ctr">
               <a:buNone/>
             </a:pPr>
             <a:r>
@@ -6765,7 +6770,7 @@
             </a:r>
           </a:p>
           <a:p>
-            <a:pPr marL="0" indent="0">
+            <a:pPr marL="0" indent="0" algn="ctr">
               <a:buNone/>
             </a:pPr>
             <a:r>
@@ -6773,7 +6778,7 @@
                 <a:latin typeface="Times New Roman" panose="02020603050405020304" pitchFamily="18" charset="0"/>
                 <a:cs typeface="Times New Roman" panose="02020603050405020304" pitchFamily="18" charset="0"/>
               </a:rPr>
-              <a:t>22 de octubre 2025, Santiago, Chile</a:t>
+              <a:t>29 de Septiembre 2025, Santiago, Chile</a:t>
             </a:r>
           </a:p>
         </p:txBody>
@@ -6807,8 +6812,8 @@
         </p:blipFill>
         <p:spPr bwMode="auto">
           <a:xfrm>
-            <a:off x="5153912" y="2109289"/>
-            <a:ext cx="1428750" cy="1428750"/>
+            <a:off x="6260740" y="2731548"/>
+            <a:ext cx="398008" cy="398008"/>
           </a:xfrm>
           <a:prstGeom prst="rect">
             <a:avLst/>
@@ -6847,7 +6852,7 @@
         </p:blipFill>
         <p:spPr>
           <a:xfrm>
-            <a:off x="7764292" y="108352"/>
+            <a:off x="3558338" y="394431"/>
             <a:ext cx="1137067" cy="956207"/>
           </a:xfrm>
           <a:prstGeom prst="rect">
@@ -6869,7 +6874,7 @@
         </p:nvSpPr>
         <p:spPr>
           <a:xfrm>
-            <a:off x="7693921" y="1064559"/>
+            <a:off x="3446848" y="1465853"/>
             <a:ext cx="1360046" cy="615553"/>
           </a:xfrm>
           <a:prstGeom prst="rect">
@@ -6891,7 +6896,7 @@
           <a:p>
             <a:r>
               <a:rPr lang="es-CL" sz="800" dirty="0"/>
-              <a:t>Ingeniería de software I</a:t>
+              <a:t>Ingeniería de software II</a:t>
             </a:r>
           </a:p>
           <a:p>
@@ -6942,8 +6947,8 @@
         </p:nvSpPr>
         <p:spPr>
           <a:xfrm>
-            <a:off x="609599" y="2768600"/>
-            <a:ext cx="7010402" cy="1320800"/>
+            <a:off x="1066799" y="2768600"/>
+            <a:ext cx="7010402" cy="879856"/>
           </a:xfrm>
         </p:spPr>
         <p:txBody>
@@ -6951,7 +6956,7 @@
           <a:lstStyle/>
           <a:p>
             <a:r>
-              <a:rPr lang="es-CL" dirty="0"/>
+              <a:rPr lang="es-CL" b="1" dirty="0"/>
               <a:t>Muchas gracias por su atención</a:t>
             </a:r>
           </a:p>
@@ -6959,10 +6964,40 @@
       </p:sp>
       <p:pic>
         <p:nvPicPr>
-          <p:cNvPr id="3" name="Picture 2" descr="Eugcom.cl">
+          <p:cNvPr id="4" name="Imagen 3" descr="Icono&#10;&#10;El contenido generado por IA puede ser incorrecto.">
             <a:extLst>
               <a:ext uri="{FF2B5EF4-FFF2-40B4-BE49-F238E27FC236}">
-                <a16:creationId xmlns:a16="http://schemas.microsoft.com/office/drawing/2014/main" id="{CE361E6D-63F2-415F-99E0-E542F0C8BFE9}"/>
+                <a16:creationId xmlns:a16="http://schemas.microsoft.com/office/drawing/2014/main" id="{C8D6AE83-B76B-8550-E60C-FAFC2196D291}"/>
+              </a:ext>
+            </a:extLst>
+          </p:cNvPr>
+          <p:cNvPicPr>
+            <a:picLocks noChangeAspect="1"/>
+          </p:cNvPicPr>
+          <p:nvPr/>
+        </p:nvPicPr>
+        <p:blipFill>
+          <a:blip r:embed="rId2"/>
+          <a:stretch>
+            <a:fillRect/>
+          </a:stretch>
+        </p:blipFill>
+        <p:spPr>
+          <a:xfrm>
+            <a:off x="3559280" y="1061784"/>
+            <a:ext cx="1728691" cy="1453728"/>
+          </a:xfrm>
+          <a:prstGeom prst="rect">
+            <a:avLst/>
+          </a:prstGeom>
+        </p:spPr>
+      </p:pic>
+      <p:pic>
+        <p:nvPicPr>
+          <p:cNvPr id="5" name="Picture 2" descr="Eugcom.cl">
+            <a:extLst>
+              <a:ext uri="{FF2B5EF4-FFF2-40B4-BE49-F238E27FC236}">
+                <a16:creationId xmlns:a16="http://schemas.microsoft.com/office/drawing/2014/main" id="{469189A9-1DC7-EAF4-BC2E-7D4B3026796E}"/>
               </a:ext>
             </a:extLst>
           </p:cNvPr>
@@ -6972,7 +7007,7 @@
           <p:nvPr/>
         </p:nvPicPr>
         <p:blipFill>
-          <a:blip r:embed="rId2">
+          <a:blip r:embed="rId3">
             <a:extLst>
               <a:ext uri="{28A0092B-C50C-407E-A947-70E740481C1C}">
                 <a14:useLocalDpi xmlns:a14="http://schemas.microsoft.com/office/drawing/2010/main" val="0"/>
@@ -6986,8 +7021,8 @@
         </p:blipFill>
         <p:spPr bwMode="auto">
           <a:xfrm>
-            <a:off x="609599" y="496025"/>
-            <a:ext cx="1137067" cy="1137067"/>
+            <a:off x="3684093" y="3648456"/>
+            <a:ext cx="1479063" cy="1479063"/>
           </a:xfrm>
           <a:prstGeom prst="rect">
             <a:avLst/>
@@ -7057,10 +7092,10 @@
           <a:p>
             <a:pPr algn="ctr"/>
             <a:r>
-              <a:rPr lang="es-CL" dirty="0"/>
+              <a:rPr lang="es-CL" b="1" dirty="0"/>
               <a:t>Contenido</a:t>
             </a:r>
-            <a:endParaRPr lang="es-419" dirty="0"/>
+            <a:endParaRPr lang="es-419" b="1" dirty="0"/>
           </a:p>
         </p:txBody>
       </p:sp>
@@ -7085,24 +7120,36 @@
           <a:bodyPr/>
           <a:lstStyle/>
           <a:p>
+            <a:pPr algn="just"/>
             <a:r>
               <a:rPr lang="es-CL" dirty="0"/>
               <a:t>Incremento 3 </a:t>
             </a:r>
-          </a:p>
-          <a:p>
+            <a:r>
+              <a:rPr lang="es-CL" dirty="0" err="1"/>
+              <a:t>cap</a:t>
+            </a:r>
+            <a:r>
+              <a:rPr lang="es-CL" dirty="0"/>
+              <a:t> 2</a:t>
+            </a:r>
+          </a:p>
+          <a:p>
+            <a:pPr algn="just"/>
             <a:r>
               <a:rPr lang="es-CL" dirty="0"/>
               <a:t>Casos de uso </a:t>
             </a:r>
           </a:p>
           <a:p>
+            <a:pPr algn="just"/>
             <a:r>
               <a:rPr lang="es-CL" dirty="0"/>
               <a:t>Diagramas Secuencia</a:t>
             </a:r>
           </a:p>
           <a:p>
+            <a:pPr algn="just"/>
             <a:r>
               <a:rPr lang="es-CL" dirty="0"/>
               <a:t>Sprint backlog y casos de uso </a:t>
@@ -7117,6 +7164,7 @@
             </a:r>
           </a:p>
           <a:p>
+            <a:pPr algn="just"/>
             <a:r>
               <a:rPr lang="es-CL" dirty="0"/>
               <a:t>Tabla de esfuerzo </a:t>
@@ -7131,12 +7179,22 @@
             </a:r>
           </a:p>
           <a:p>
+            <a:pPr algn="just"/>
             <a:r>
               <a:rPr lang="es-CL" dirty="0"/>
-              <a:t>Pruebas Unitarias cap5</a:t>
-            </a:r>
-          </a:p>
-          <a:p>
+              <a:t>Pruebas Unitarias </a:t>
+            </a:r>
+            <a:r>
+              <a:rPr lang="es-CL" dirty="0" err="1"/>
+              <a:t>cap</a:t>
+            </a:r>
+            <a:r>
+              <a:rPr lang="es-CL" dirty="0"/>
+              <a:t> 5</a:t>
+            </a:r>
+          </a:p>
+          <a:p>
+            <a:pPr algn="just"/>
             <a:r>
               <a:rPr lang="es-CL" dirty="0"/>
               <a:t>Pruebas de sistema </a:t>
@@ -7334,7 +7392,7 @@
           <a:lstStyle/>
           <a:p>
             <a:r>
-              <a:rPr lang="es-419" sz="3100"/>
+              <a:rPr lang="es-419" sz="3100" b="1" dirty="0"/>
               <a:t>Introducción</a:t>
             </a:r>
           </a:p>
@@ -7461,6 +7519,53 @@
           </a:p>
         </p:txBody>
       </p:sp>
+      <p:pic>
+        <p:nvPicPr>
+          <p:cNvPr id="5" name="Picture 2" descr="Eugcom.cl">
+            <a:extLst>
+              <a:ext uri="{FF2B5EF4-FFF2-40B4-BE49-F238E27FC236}">
+                <a16:creationId xmlns:a16="http://schemas.microsoft.com/office/drawing/2014/main" id="{9DE2593D-C8E3-D325-8501-95C378098BB3}"/>
+              </a:ext>
+            </a:extLst>
+          </p:cNvPr>
+          <p:cNvPicPr>
+            <a:picLocks noChangeAspect="1" noChangeArrowheads="1"/>
+          </p:cNvPicPr>
+          <p:nvPr/>
+        </p:nvPicPr>
+        <p:blipFill>
+          <a:blip r:embed="rId2">
+            <a:extLst>
+              <a:ext uri="{28A0092B-C50C-407E-A947-70E740481C1C}">
+                <a14:useLocalDpi xmlns:a14="http://schemas.microsoft.com/office/drawing/2010/main" val="0"/>
+              </a:ext>
+            </a:extLst>
+          </a:blip>
+          <a:srcRect/>
+          <a:stretch>
+            <a:fillRect/>
+          </a:stretch>
+        </p:blipFill>
+        <p:spPr bwMode="auto">
+          <a:xfrm>
+            <a:off x="102849" y="108353"/>
+            <a:ext cx="577448" cy="577448"/>
+          </a:xfrm>
+          <a:prstGeom prst="rect">
+            <a:avLst/>
+          </a:prstGeom>
+          <a:noFill/>
+          <a:extLst>
+            <a:ext uri="{909E8E84-426E-40DD-AFC4-6F175D3DCCD1}">
+              <a14:hiddenFill xmlns:a14="http://schemas.microsoft.com/office/drawing/2010/main">
+                <a:solidFill>
+                  <a:srgbClr val="FFFFFF"/>
+                </a:solidFill>
+              </a14:hiddenFill>
+            </a:ext>
+          </a:extLst>
+        </p:spPr>
+      </p:pic>
     </p:spTree>
   </p:cSld>
   <p:clrMapOvr>
@@ -7496,24 +7601,29 @@
             <p:ph type="title"/>
           </p:nvPr>
         </p:nvSpPr>
-        <p:spPr/>
+        <p:spPr>
+          <a:xfrm>
+            <a:off x="2851403" y="448893"/>
+            <a:ext cx="3441193" cy="807720"/>
+          </a:xfrm>
+        </p:spPr>
         <p:txBody>
           <a:bodyPr/>
           <a:lstStyle/>
           <a:p>
             <a:r>
-              <a:rPr dirty="0" err="1"/>
+              <a:rPr b="1" dirty="0" err="1"/>
               <a:t>Incremento</a:t>
             </a:r>
             <a:r>
-              <a:rPr dirty="0"/>
+              <a:rPr b="1" dirty="0"/>
               <a:t> </a:t>
             </a:r>
             <a:r>
-              <a:rPr lang="es-CL" dirty="0"/>
+              <a:rPr lang="es-CL" b="1" dirty="0"/>
               <a:t>3</a:t>
             </a:r>
-            <a:endParaRPr dirty="0"/>
+            <a:endParaRPr b="1" dirty="0"/>
           </a:p>
         </p:txBody>
       </p:sp>
@@ -7615,8 +7725,8 @@
         </p:blipFill>
         <p:spPr bwMode="auto">
           <a:xfrm>
-            <a:off x="5896737" y="2000250"/>
-            <a:ext cx="1428750" cy="1428750"/>
+            <a:off x="102849" y="108353"/>
+            <a:ext cx="577448" cy="577448"/>
           </a:xfrm>
           <a:prstGeom prst="rect">
             <a:avLst/>
@@ -7712,7 +7822,7 @@
           <p:cNvPr id="6" name="Imagen 5" descr="Gráfico, Gráfico de barras, Histograma&#10;&#10;El contenido generado por IA puede ser incorrecto.">
             <a:extLst>
               <a:ext uri="{FF2B5EF4-FFF2-40B4-BE49-F238E27FC236}">
-                <a16:creationId xmlns:a16="http://schemas.microsoft.com/office/drawing/2014/main" id="{1B20F5EC-E599-5EDB-2EB2-6E17C05E072A}"/>
+                <a16:creationId xmlns:a16="http://schemas.microsoft.com/office/drawing/2014/main" id="{1A250E69-2420-A118-6C38-59F8EC6B6975}"/>
               </a:ext>
             </a:extLst>
           </p:cNvPr>
@@ -7729,34 +7839,34 @@
         </p:blipFill>
         <p:spPr>
           <a:xfrm>
-            <a:off x="609599" y="3611593"/>
-            <a:ext cx="3191871" cy="2822663"/>
+            <a:off x="509650" y="3654900"/>
+            <a:ext cx="3217417" cy="2845253"/>
           </a:xfrm>
           <a:prstGeom prst="rect">
             <a:avLst/>
           </a:prstGeom>
-          <a:ln w="38100" cap="sq">
-            <a:solidFill>
-              <a:srgbClr val="000000"/>
-            </a:solidFill>
-            <a:prstDash val="solid"/>
-            <a:miter lim="800000"/>
-          </a:ln>
-          <a:effectLst>
-            <a:outerShdw blurRad="50800" dist="38100" dir="2700000" algn="tl" rotWithShape="0">
-              <a:srgbClr val="000000">
-                <a:alpha val="43000"/>
-              </a:srgbClr>
-            </a:outerShdw>
-          </a:effectLst>
         </p:spPr>
+        <p:style>
+          <a:lnRef idx="2">
+            <a:schemeClr val="dk1"/>
+          </a:lnRef>
+          <a:fillRef idx="1">
+            <a:schemeClr val="lt1"/>
+          </a:fillRef>
+          <a:effectRef idx="0">
+            <a:schemeClr val="dk1"/>
+          </a:effectRef>
+          <a:fontRef idx="minor">
+            <a:schemeClr val="dk1"/>
+          </a:fontRef>
+        </p:style>
       </p:pic>
       <p:pic>
         <p:nvPicPr>
           <p:cNvPr id="7" name="Imagen 6" descr="Gráfico, Gráfico circular&#10;&#10;El contenido generado por IA puede ser incorrecto.">
             <a:extLst>
               <a:ext uri="{FF2B5EF4-FFF2-40B4-BE49-F238E27FC236}">
-                <a16:creationId xmlns:a16="http://schemas.microsoft.com/office/drawing/2014/main" id="{66652064-34CB-6169-3E2B-0308C5E5C8B9}"/>
+                <a16:creationId xmlns:a16="http://schemas.microsoft.com/office/drawing/2014/main" id="{79BE7D5A-2AB0-69F1-0152-E687AB796A25}"/>
               </a:ext>
             </a:extLst>
           </p:cNvPr>
@@ -7773,27 +7883,27 @@
         </p:blipFill>
         <p:spPr>
           <a:xfrm>
-            <a:off x="4459350" y="3659190"/>
-            <a:ext cx="2616456" cy="2802544"/>
+            <a:off x="4400933" y="3654901"/>
+            <a:ext cx="2656329" cy="2845252"/>
           </a:xfrm>
           <a:prstGeom prst="rect">
             <a:avLst/>
           </a:prstGeom>
-          <a:ln w="38100" cap="sq">
-            <a:solidFill>
-              <a:srgbClr val="000000"/>
-            </a:solidFill>
-            <a:prstDash val="solid"/>
-            <a:miter lim="800000"/>
-          </a:ln>
-          <a:effectLst>
-            <a:outerShdw blurRad="50800" dist="38100" dir="2700000" algn="tl" rotWithShape="0">
-              <a:srgbClr val="000000">
-                <a:alpha val="43000"/>
-              </a:srgbClr>
-            </a:outerShdw>
-          </a:effectLst>
         </p:spPr>
+        <p:style>
+          <a:lnRef idx="2">
+            <a:schemeClr val="dk1"/>
+          </a:lnRef>
+          <a:fillRef idx="1">
+            <a:schemeClr val="lt1"/>
+          </a:fillRef>
+          <a:effectRef idx="0">
+            <a:schemeClr val="dk1"/>
+          </a:effectRef>
+          <a:fontRef idx="minor">
+            <a:schemeClr val="dk1"/>
+          </a:fontRef>
+        </p:style>
       </p:pic>
     </p:spTree>
   </p:cSld>
@@ -7825,7 +7935,7 @@
           <p:cNvPr id="2" name="Título 1">
             <a:extLst>
               <a:ext uri="{FF2B5EF4-FFF2-40B4-BE49-F238E27FC236}">
-                <a16:creationId xmlns:a16="http://schemas.microsoft.com/office/drawing/2014/main" id="{42D6B30E-CF24-4AD5-8A2B-CF35257C303D}"/>
+                <a16:creationId xmlns:a16="http://schemas.microsoft.com/office/drawing/2014/main" id="{8F45BA60-3D89-444B-B3F1-D90FC5798A47}"/>
               </a:ext>
             </a:extLst>
           </p:cNvPr>
@@ -7836,24 +7946,29 @@
             <p:ph type="title"/>
           </p:nvPr>
         </p:nvSpPr>
-        <p:spPr/>
+        <p:spPr>
+          <a:xfrm>
+            <a:off x="2378325" y="336087"/>
+            <a:ext cx="2810257" cy="771144"/>
+          </a:xfrm>
+        </p:spPr>
         <p:txBody>
           <a:bodyPr/>
           <a:lstStyle/>
           <a:p>
             <a:r>
-              <a:rPr lang="es-CL" dirty="0"/>
-              <a:t>Casos de uso </a:t>
+              <a:rPr lang="es-CL" b="1" dirty="0"/>
+              <a:t>Caso de uso</a:t>
             </a:r>
           </a:p>
         </p:txBody>
       </p:sp>
       <p:pic>
         <p:nvPicPr>
-          <p:cNvPr id="4" name="Imagen 3">
+          <p:cNvPr id="3" name="Imagen 2" descr="Icono&#10;&#10;El contenido generado por IA puede ser incorrecto.">
             <a:extLst>
               <a:ext uri="{FF2B5EF4-FFF2-40B4-BE49-F238E27FC236}">
-                <a16:creationId xmlns:a16="http://schemas.microsoft.com/office/drawing/2014/main" id="{39353D29-2164-4C2E-8D11-CEFDA18E067D}"/>
+                <a16:creationId xmlns:a16="http://schemas.microsoft.com/office/drawing/2014/main" id="{A0DDD05E-97D6-B8E4-F170-B3372DA001E5}"/>
               </a:ext>
             </a:extLst>
           </p:cNvPr>
@@ -7870,18 +7985,109 @@
         </p:blipFill>
         <p:spPr>
           <a:xfrm>
-            <a:off x="609599" y="1386541"/>
-            <a:ext cx="5878968" cy="4530165"/>
+            <a:off x="7764292" y="108352"/>
+            <a:ext cx="1137067" cy="956207"/>
           </a:xfrm>
           <a:prstGeom prst="rect">
             <a:avLst/>
           </a:prstGeom>
         </p:spPr>
       </p:pic>
+      <p:pic>
+        <p:nvPicPr>
+          <p:cNvPr id="4" name="Picture 2" descr="Eugcom.cl">
+            <a:extLst>
+              <a:ext uri="{FF2B5EF4-FFF2-40B4-BE49-F238E27FC236}">
+                <a16:creationId xmlns:a16="http://schemas.microsoft.com/office/drawing/2014/main" id="{3375520D-3975-2513-BC47-AF83AB4BA93B}"/>
+              </a:ext>
+            </a:extLst>
+          </p:cNvPr>
+          <p:cNvPicPr>
+            <a:picLocks noChangeAspect="1" noChangeArrowheads="1"/>
+          </p:cNvPicPr>
+          <p:nvPr/>
+        </p:nvPicPr>
+        <p:blipFill>
+          <a:blip r:embed="rId3">
+            <a:extLst>
+              <a:ext uri="{28A0092B-C50C-407E-A947-70E740481C1C}">
+                <a14:useLocalDpi xmlns:a14="http://schemas.microsoft.com/office/drawing/2010/main" val="0"/>
+              </a:ext>
+            </a:extLst>
+          </a:blip>
+          <a:srcRect/>
+          <a:stretch>
+            <a:fillRect/>
+          </a:stretch>
+        </p:blipFill>
+        <p:spPr bwMode="auto">
+          <a:xfrm>
+            <a:off x="102849" y="108353"/>
+            <a:ext cx="577448" cy="577448"/>
+          </a:xfrm>
+          <a:prstGeom prst="rect">
+            <a:avLst/>
+          </a:prstGeom>
+          <a:noFill/>
+          <a:extLst>
+            <a:ext uri="{909E8E84-426E-40DD-AFC4-6F175D3DCCD1}">
+              <a14:hiddenFill xmlns:a14="http://schemas.microsoft.com/office/drawing/2010/main">
+                <a:solidFill>
+                  <a:srgbClr val="FFFFFF"/>
+                </a:solidFill>
+              </a14:hiddenFill>
+            </a:ext>
+          </a:extLst>
+        </p:spPr>
+      </p:pic>
+      <p:pic>
+        <p:nvPicPr>
+          <p:cNvPr id="5" name="Imagen 4">
+            <a:extLst>
+              <a:ext uri="{FF2B5EF4-FFF2-40B4-BE49-F238E27FC236}">
+                <a16:creationId xmlns:a16="http://schemas.microsoft.com/office/drawing/2014/main" id="{7CD1EA93-72AC-9B22-DEE2-2DFAACBEADF1}"/>
+              </a:ext>
+            </a:extLst>
+          </p:cNvPr>
+          <p:cNvPicPr>
+            <a:picLocks noChangeAspect="1"/>
+          </p:cNvPicPr>
+          <p:nvPr/>
+        </p:nvPicPr>
+        <p:blipFill>
+          <a:blip r:embed="rId4"/>
+          <a:stretch>
+            <a:fillRect/>
+          </a:stretch>
+        </p:blipFill>
+        <p:spPr>
+          <a:xfrm>
+            <a:off x="843971" y="1541989"/>
+            <a:ext cx="5878968" cy="4530165"/>
+          </a:xfrm>
+          <a:prstGeom prst="rect">
+            <a:avLst/>
+          </a:prstGeom>
+          <a:ln w="38100" cap="sq">
+            <a:solidFill>
+              <a:srgbClr val="000000"/>
+            </a:solidFill>
+            <a:prstDash val="solid"/>
+            <a:miter lim="800000"/>
+          </a:ln>
+          <a:effectLst>
+            <a:outerShdw blurRad="50800" dist="38100" dir="2700000" algn="tl" rotWithShape="0">
+              <a:srgbClr val="000000">
+                <a:alpha val="43000"/>
+              </a:srgbClr>
+            </a:outerShdw>
+          </a:effectLst>
+        </p:spPr>
+      </p:pic>
     </p:spTree>
     <p:extLst>
       <p:ext uri="{BB962C8B-B14F-4D97-AF65-F5344CB8AC3E}">
-        <p14:creationId xmlns:p14="http://schemas.microsoft.com/office/powerpoint/2010/main" val="3175595360"/>
+        <p14:creationId xmlns:p14="http://schemas.microsoft.com/office/powerpoint/2010/main" val="3065052590"/>
       </p:ext>
     </p:extLst>
   </p:cSld>
@@ -7913,7 +8119,7 @@
           <p:cNvPr id="2" name="Título 1">
             <a:extLst>
               <a:ext uri="{FF2B5EF4-FFF2-40B4-BE49-F238E27FC236}">
-                <a16:creationId xmlns:a16="http://schemas.microsoft.com/office/drawing/2014/main" id="{8F45BA60-3D89-444B-B3F1-D90FC5798A47}"/>
+                <a16:creationId xmlns:a16="http://schemas.microsoft.com/office/drawing/2014/main" id="{F1866796-51B0-45E3-AD8F-D35E7FACE5F4}"/>
               </a:ext>
             </a:extLst>
           </p:cNvPr>
@@ -7924,24 +8130,31 @@
             <p:ph type="title"/>
           </p:nvPr>
         </p:nvSpPr>
-        <p:spPr/>
-        <p:txBody>
-          <a:bodyPr/>
+        <p:spPr>
+          <a:xfrm>
+            <a:off x="1548464" y="226359"/>
+            <a:ext cx="5421323" cy="844296"/>
+          </a:xfrm>
+        </p:spPr>
+        <p:txBody>
+          <a:bodyPr>
+            <a:noAutofit/>
+          </a:bodyPr>
           <a:lstStyle/>
           <a:p>
             <a:r>
-              <a:rPr lang="es-CL" dirty="0"/>
-              <a:t>Casos de uso</a:t>
+              <a:rPr lang="es-CL" b="1" dirty="0"/>
+              <a:t>Diagramas de secuencia</a:t>
             </a:r>
           </a:p>
         </p:txBody>
       </p:sp>
       <p:pic>
         <p:nvPicPr>
-          <p:cNvPr id="4" name="Imagen 3">
+          <p:cNvPr id="3" name="Imagen 2" descr="Icono&#10;&#10;El contenido generado por IA puede ser incorrecto.">
             <a:extLst>
               <a:ext uri="{FF2B5EF4-FFF2-40B4-BE49-F238E27FC236}">
-                <a16:creationId xmlns:a16="http://schemas.microsoft.com/office/drawing/2014/main" id="{AFDFFE1A-81BE-44AE-80AB-FB3A25D900EE}"/>
+                <a16:creationId xmlns:a16="http://schemas.microsoft.com/office/drawing/2014/main" id="{C8E875FD-C279-295C-FA69-BCCC21A2B631}"/>
               </a:ext>
             </a:extLst>
           </p:cNvPr>
@@ -7958,18 +8171,105 @@
         </p:blipFill>
         <p:spPr>
           <a:xfrm>
-            <a:off x="609599" y="1345457"/>
-            <a:ext cx="6015319" cy="4526425"/>
+            <a:off x="7764292" y="108352"/>
+            <a:ext cx="1137067" cy="956207"/>
           </a:xfrm>
           <a:prstGeom prst="rect">
             <a:avLst/>
           </a:prstGeom>
         </p:spPr>
       </p:pic>
+      <p:pic>
+        <p:nvPicPr>
+          <p:cNvPr id="4" name="Picture 2" descr="Eugcom.cl">
+            <a:extLst>
+              <a:ext uri="{FF2B5EF4-FFF2-40B4-BE49-F238E27FC236}">
+                <a16:creationId xmlns:a16="http://schemas.microsoft.com/office/drawing/2014/main" id="{25E4DD3E-7B80-340E-04C8-89F9A65C05BC}"/>
+              </a:ext>
+            </a:extLst>
+          </p:cNvPr>
+          <p:cNvPicPr>
+            <a:picLocks noChangeAspect="1" noChangeArrowheads="1"/>
+          </p:cNvPicPr>
+          <p:nvPr/>
+        </p:nvPicPr>
+        <p:blipFill>
+          <a:blip r:embed="rId3">
+            <a:extLst>
+              <a:ext uri="{28A0092B-C50C-407E-A947-70E740481C1C}">
+                <a14:useLocalDpi xmlns:a14="http://schemas.microsoft.com/office/drawing/2010/main" val="0"/>
+              </a:ext>
+            </a:extLst>
+          </a:blip>
+          <a:srcRect/>
+          <a:stretch>
+            <a:fillRect/>
+          </a:stretch>
+        </p:blipFill>
+        <p:spPr bwMode="auto">
+          <a:xfrm>
+            <a:off x="102849" y="108353"/>
+            <a:ext cx="577448" cy="577448"/>
+          </a:xfrm>
+          <a:prstGeom prst="rect">
+            <a:avLst/>
+          </a:prstGeom>
+          <a:noFill/>
+          <a:extLst>
+            <a:ext uri="{909E8E84-426E-40DD-AFC4-6F175D3DCCD1}">
+              <a14:hiddenFill xmlns:a14="http://schemas.microsoft.com/office/drawing/2010/main">
+                <a:solidFill>
+                  <a:srgbClr val="FFFFFF"/>
+                </a:solidFill>
+              </a14:hiddenFill>
+            </a:ext>
+          </a:extLst>
+        </p:spPr>
+      </p:pic>
+      <p:pic>
+        <p:nvPicPr>
+          <p:cNvPr id="6" name="Imagen 5" descr="Imagen que contiene Diagrama&#10;&#10;El contenido generado por IA puede ser incorrecto.">
+            <a:extLst>
+              <a:ext uri="{FF2B5EF4-FFF2-40B4-BE49-F238E27FC236}">
+                <a16:creationId xmlns:a16="http://schemas.microsoft.com/office/drawing/2014/main" id="{362A7A94-A324-1244-3DE0-BAC5474FBA73}"/>
+              </a:ext>
+            </a:extLst>
+          </p:cNvPr>
+          <p:cNvPicPr>
+            <a:picLocks noChangeAspect="1"/>
+          </p:cNvPicPr>
+          <p:nvPr/>
+        </p:nvPicPr>
+        <p:blipFill>
+          <a:blip r:embed="rId4"/>
+          <a:stretch>
+            <a:fillRect/>
+          </a:stretch>
+        </p:blipFill>
+        <p:spPr>
+          <a:xfrm>
+            <a:off x="174734" y="1782743"/>
+            <a:ext cx="8168781" cy="3768202"/>
+          </a:xfrm>
+          <a:prstGeom prst="rect">
+            <a:avLst/>
+          </a:prstGeom>
+          <a:ln>
+            <a:noFill/>
+          </a:ln>
+          <a:effectLst>
+            <a:outerShdw blurRad="292100" dist="139700" dir="2700000" algn="tl" rotWithShape="0">
+              <a:srgbClr val="333333">
+                <a:alpha val="65000"/>
+              </a:srgbClr>
+            </a:outerShdw>
+          </a:effectLst>
+        </p:spPr>
+      </p:pic>
     </p:spTree>
     <p:extLst>
       <p:ext uri="{BB962C8B-B14F-4D97-AF65-F5344CB8AC3E}">
-        <p14:creationId xmlns:p14="http://schemas.microsoft.com/office/powerpoint/2010/main" val="3065052590"/>
+        <p14:creationId xmlns:p14="http://schemas.microsoft.com/office/powerpoint/2010/main" val="3355276538"/>
       </p:ext>
     </p:extLst>
   </p:cSld>
@@ -7996,40 +8296,12 @@
           <a:chExt cx="0" cy="0"/>
         </a:xfrm>
       </p:grpSpPr>
-      <p:sp>
-        <p:nvSpPr>
-          <p:cNvPr id="2" name="Título 1">
+      <p:pic>
+        <p:nvPicPr>
+          <p:cNvPr id="4" name="Imagen 3" descr="Interfaz de usuario gráfica, Tabla&#10;&#10;El contenido generado por IA puede ser incorrecto.">
             <a:extLst>
               <a:ext uri="{FF2B5EF4-FFF2-40B4-BE49-F238E27FC236}">
-                <a16:creationId xmlns:a16="http://schemas.microsoft.com/office/drawing/2014/main" id="{F1866796-51B0-45E3-AD8F-D35E7FACE5F4}"/>
-              </a:ext>
-            </a:extLst>
-          </p:cNvPr>
-          <p:cNvSpPr>
-            <a:spLocks noGrp="1"/>
-          </p:cNvSpPr>
-          <p:nvPr>
-            <p:ph type="title"/>
-          </p:nvPr>
-        </p:nvSpPr>
-        <p:spPr/>
-        <p:txBody>
-          <a:bodyPr/>
-          <a:lstStyle/>
-          <a:p>
-            <a:r>
-              <a:rPr lang="es-CL" dirty="0"/>
-              <a:t>Diagramas de secuencia</a:t>
-            </a:r>
-          </a:p>
-        </p:txBody>
-      </p:sp>
-      <p:pic>
-        <p:nvPicPr>
-          <p:cNvPr id="8" name="Imagen 7">
-            <a:extLst>
-              <a:ext uri="{FF2B5EF4-FFF2-40B4-BE49-F238E27FC236}">
-                <a16:creationId xmlns:a16="http://schemas.microsoft.com/office/drawing/2014/main" id="{02CCDF87-E8D3-46FA-BE31-9BAA591DE4BB}"/>
+                <a16:creationId xmlns:a16="http://schemas.microsoft.com/office/drawing/2014/main" id="{E52159D6-2DB0-BC35-4AD3-0B890765CB87}"/>
               </a:ext>
             </a:extLst>
           </p:cNvPr>
@@ -8046,18 +8318,139 @@
         </p:blipFill>
         <p:spPr>
           <a:xfrm>
-            <a:off x="215153" y="1443100"/>
-            <a:ext cx="7449671" cy="4195700"/>
+            <a:off x="945172" y="2334708"/>
+            <a:ext cx="7253655" cy="1839259"/>
+          </a:xfrm>
+          <a:prstGeom prst="rect">
+            <a:avLst/>
+          </a:prstGeom>
+          <a:ln>
+            <a:noFill/>
+          </a:ln>
+          <a:effectLst>
+            <a:outerShdw blurRad="292100" dist="139700" dir="2700000" algn="tl" rotWithShape="0">
+              <a:srgbClr val="333333">
+                <a:alpha val="65000"/>
+              </a:srgbClr>
+            </a:outerShdw>
+          </a:effectLst>
+        </p:spPr>
+      </p:pic>
+      <p:sp>
+        <p:nvSpPr>
+          <p:cNvPr id="6" name="Título 1">
+            <a:extLst>
+              <a:ext uri="{FF2B5EF4-FFF2-40B4-BE49-F238E27FC236}">
+                <a16:creationId xmlns:a16="http://schemas.microsoft.com/office/drawing/2014/main" id="{6F3B5B07-8CB4-7CB6-9454-7A795E12DD2D}"/>
+              </a:ext>
+            </a:extLst>
+          </p:cNvPr>
+          <p:cNvSpPr txBox="1">
+            <a:spLocks/>
+          </p:cNvSpPr>
+          <p:nvPr/>
+        </p:nvSpPr>
+        <p:spPr>
+          <a:xfrm>
+            <a:off x="1452458" y="402636"/>
+            <a:ext cx="5314101" cy="758742"/>
           </a:xfrm>
           <a:prstGeom prst="rect">
             <a:avLst/>
           </a:prstGeom>
         </p:spPr>
-      </p:pic>
+        <p:txBody>
+          <a:bodyPr vert="horz" lIns="91440" tIns="45720" rIns="91440" bIns="45720" rtlCol="0" anchor="t">
+            <a:normAutofit fontScale="77500" lnSpcReduction="20000"/>
+          </a:bodyPr>
+          <a:lstStyle>
+            <a:lvl1pPr algn="l" defTabSz="457200" rtl="0" eaLnBrk="1" latinLnBrk="0" hangingPunct="1">
+              <a:spcBef>
+                <a:spcPct val="0"/>
+              </a:spcBef>
+              <a:buNone/>
+              <a:defRPr sz="3600" kern="1200">
+                <a:solidFill>
+                  <a:schemeClr val="accent1"/>
+                </a:solidFill>
+                <a:latin typeface="+mj-lt"/>
+                <a:ea typeface="+mj-ea"/>
+                <a:cs typeface="+mj-cs"/>
+              </a:defRPr>
+            </a:lvl1pPr>
+            <a:lvl2pPr eaLnBrk="1" hangingPunct="1">
+              <a:defRPr>
+                <a:solidFill>
+                  <a:schemeClr val="tx2"/>
+                </a:solidFill>
+              </a:defRPr>
+            </a:lvl2pPr>
+            <a:lvl3pPr eaLnBrk="1" hangingPunct="1">
+              <a:defRPr>
+                <a:solidFill>
+                  <a:schemeClr val="tx2"/>
+                </a:solidFill>
+              </a:defRPr>
+            </a:lvl3pPr>
+            <a:lvl4pPr eaLnBrk="1" hangingPunct="1">
+              <a:defRPr>
+                <a:solidFill>
+                  <a:schemeClr val="tx2"/>
+                </a:solidFill>
+              </a:defRPr>
+            </a:lvl4pPr>
+            <a:lvl5pPr eaLnBrk="1" hangingPunct="1">
+              <a:defRPr>
+                <a:solidFill>
+                  <a:schemeClr val="tx2"/>
+                </a:solidFill>
+              </a:defRPr>
+            </a:lvl5pPr>
+            <a:lvl6pPr eaLnBrk="1" hangingPunct="1">
+              <a:defRPr>
+                <a:solidFill>
+                  <a:schemeClr val="tx2"/>
+                </a:solidFill>
+              </a:defRPr>
+            </a:lvl6pPr>
+            <a:lvl7pPr eaLnBrk="1" hangingPunct="1">
+              <a:defRPr>
+                <a:solidFill>
+                  <a:schemeClr val="tx2"/>
+                </a:solidFill>
+              </a:defRPr>
+            </a:lvl7pPr>
+            <a:lvl8pPr eaLnBrk="1" hangingPunct="1">
+              <a:defRPr>
+                <a:solidFill>
+                  <a:schemeClr val="tx2"/>
+                </a:solidFill>
+              </a:defRPr>
+            </a:lvl8pPr>
+            <a:lvl9pPr eaLnBrk="1" hangingPunct="1">
+              <a:defRPr>
+                <a:solidFill>
+                  <a:schemeClr val="tx2"/>
+                </a:solidFill>
+              </a:defRPr>
+            </a:lvl9pPr>
+          </a:lstStyle>
+          <a:p>
+            <a:r>
+              <a:rPr lang="en-US" b="1" dirty="0"/>
+              <a:t>Sprint Backlog y Casos de Uso</a:t>
+            </a:r>
+            <a:r>
+              <a:rPr lang="es-CL" b="1" dirty="0"/>
+              <a:t> </a:t>
+            </a:r>
+          </a:p>
+        </p:txBody>
+      </p:sp>
     </p:spTree>
     <p:extLst>
       <p:ext uri="{BB962C8B-B14F-4D97-AF65-F5344CB8AC3E}">
-        <p14:creationId xmlns:p14="http://schemas.microsoft.com/office/powerpoint/2010/main" val="3355276538"/>
+        <p14:creationId xmlns:p14="http://schemas.microsoft.com/office/powerpoint/2010/main" val="2629285981"/>
       </p:ext>
     </p:extLst>
   </p:cSld>
@@ -8070,14 +8463,6 @@
 <file path=ppt/slides/slide8.xml><?xml version="1.0" encoding="utf-8"?>
 <p:sld xmlns:a="http://schemas.openxmlformats.org/drawingml/2006/main" xmlns:r="http://schemas.openxmlformats.org/officeDocument/2006/relationships" xmlns:p="http://schemas.openxmlformats.org/presentationml/2006/main">
   <p:cSld>
-    <p:bg>
-      <p:bgPr>
-        <a:solidFill>
-          <a:schemeClr val="bg1"/>
-        </a:solidFill>
-        <a:effectLst/>
-      </p:bgPr>
-    </p:bg>
     <p:spTree>
       <p:nvGrpSpPr>
         <p:cNvPr id="1" name=""/>
@@ -8092,762 +8477,15 @@
           <a:chExt cx="0" cy="0"/>
         </a:xfrm>
       </p:grpSpPr>
-      <p:grpSp>
-        <p:nvGrpSpPr>
-          <p:cNvPr id="7175" name="Group 7174">
+      <p:sp>
+        <p:nvSpPr>
+          <p:cNvPr id="2" name="Título 1">
             <a:extLst>
               <a:ext uri="{FF2B5EF4-FFF2-40B4-BE49-F238E27FC236}">
-                <a16:creationId xmlns:a16="http://schemas.microsoft.com/office/drawing/2014/main" id="{B4DE830A-B531-4A3B-96F6-0ECE88B08555}"/>
-              </a:ext>
-              <a:ext uri="{C183D7F6-B498-43B3-948B-1728B52AA6E4}">
-                <adec:decorative xmlns:adec="http://schemas.microsoft.com/office/drawing/2017/decorative" val="1"/>
+                <a16:creationId xmlns:a16="http://schemas.microsoft.com/office/drawing/2014/main" id="{8E4A4D2D-A1BC-861C-7886-0067FFF2B614}"/>
               </a:ext>
             </a:extLst>
           </p:cNvPr>
-          <p:cNvGrpSpPr>
-            <a:grpSpLocks noGrp="1" noUngrp="1" noRot="1" noChangeAspect="1" noMove="1" noResize="1"/>
-          </p:cNvGrpSpPr>
-          <p:nvPr>
-            <p:extLst>
-              <p:ext uri="{386F3935-93C4-4BCD-93E2-E3B085C9AB24}">
-                <p16:designElem xmlns:p16="http://schemas.microsoft.com/office/powerpoint/2015/main" val="1"/>
-              </p:ext>
-            </p:extLst>
-          </p:nvPr>
-        </p:nvGrpSpPr>
-        <p:grpSpPr>
-          <a:xfrm>
-            <a:off x="0" y="-8467"/>
-            <a:ext cx="9144001" cy="6866467"/>
-            <a:chOff x="0" y="-8467"/>
-            <a:chExt cx="12192000" cy="6866467"/>
-          </a:xfrm>
-        </p:grpSpPr>
-        <p:cxnSp>
-          <p:nvCxnSpPr>
-            <p:cNvPr id="7176" name="Straight Connector 7175">
-              <a:extLst>
-                <a:ext uri="{FF2B5EF4-FFF2-40B4-BE49-F238E27FC236}">
-                  <a16:creationId xmlns:a16="http://schemas.microsoft.com/office/drawing/2014/main" id="{2813DF2C-461A-4A8F-9679-A172790D1F3A}"/>
-                </a:ext>
-                <a:ext uri="{C183D7F6-B498-43B3-948B-1728B52AA6E4}">
-                  <adec:decorative xmlns:adec="http://schemas.microsoft.com/office/drawing/2017/decorative" val="1"/>
-                </a:ext>
-              </a:extLst>
-            </p:cNvPr>
-            <p:cNvCxnSpPr/>
-            <p:nvPr>
-              <p:extLst>
-                <p:ext uri="{386F3935-93C4-4BCD-93E2-E3B085C9AB24}">
-                  <p16:designElem xmlns:p16="http://schemas.microsoft.com/office/powerpoint/2015/main" val="1"/>
-                </p:ext>
-              </p:extLst>
-            </p:nvPr>
-          </p:nvCxnSpPr>
-          <p:spPr>
-            <a:xfrm>
-              <a:off x="9371012" y="0"/>
-              <a:ext cx="1219200" cy="6858000"/>
-            </a:xfrm>
-            <a:prstGeom prst="line">
-              <a:avLst/>
-            </a:prstGeom>
-            <a:ln w="9525">
-              <a:solidFill>
-                <a:schemeClr val="bg1">
-                  <a:lumMod val="75000"/>
-                </a:schemeClr>
-              </a:solidFill>
-            </a:ln>
-          </p:spPr>
-          <p:style>
-            <a:lnRef idx="2">
-              <a:schemeClr val="accent1"/>
-            </a:lnRef>
-            <a:fillRef idx="0">
-              <a:schemeClr val="accent1"/>
-            </a:fillRef>
-            <a:effectRef idx="1">
-              <a:schemeClr val="accent1"/>
-            </a:effectRef>
-            <a:fontRef idx="minor">
-              <a:schemeClr val="tx1"/>
-            </a:fontRef>
-          </p:style>
-        </p:cxnSp>
-        <p:cxnSp>
-          <p:nvCxnSpPr>
-            <p:cNvPr id="7177" name="Straight Connector 7176">
-              <a:extLst>
-                <a:ext uri="{FF2B5EF4-FFF2-40B4-BE49-F238E27FC236}">
-                  <a16:creationId xmlns:a16="http://schemas.microsoft.com/office/drawing/2014/main" id="{54CD3A85-C039-4249-86E4-1EB9318B5495}"/>
-                </a:ext>
-                <a:ext uri="{C183D7F6-B498-43B3-948B-1728B52AA6E4}">
-                  <adec:decorative xmlns:adec="http://schemas.microsoft.com/office/drawing/2017/decorative" val="1"/>
-                </a:ext>
-              </a:extLst>
-            </p:cNvPr>
-            <p:cNvCxnSpPr/>
-            <p:nvPr>
-              <p:extLst>
-                <p:ext uri="{386F3935-93C4-4BCD-93E2-E3B085C9AB24}">
-                  <p16:designElem xmlns:p16="http://schemas.microsoft.com/office/powerpoint/2015/main" val="1"/>
-                </p:ext>
-              </p:extLst>
-            </p:nvPr>
-          </p:nvCxnSpPr>
-          <p:spPr>
-            <a:xfrm flipH="1">
-              <a:off x="7425267" y="3681413"/>
-              <a:ext cx="4763558" cy="3176587"/>
-            </a:xfrm>
-            <a:prstGeom prst="line">
-              <a:avLst/>
-            </a:prstGeom>
-            <a:ln w="9525">
-              <a:solidFill>
-                <a:schemeClr val="bg1">
-                  <a:lumMod val="85000"/>
-                </a:schemeClr>
-              </a:solidFill>
-            </a:ln>
-          </p:spPr>
-          <p:style>
-            <a:lnRef idx="2">
-              <a:schemeClr val="accent1"/>
-            </a:lnRef>
-            <a:fillRef idx="0">
-              <a:schemeClr val="accent1"/>
-            </a:fillRef>
-            <a:effectRef idx="1">
-              <a:schemeClr val="accent1"/>
-            </a:effectRef>
-            <a:fontRef idx="minor">
-              <a:schemeClr val="tx1"/>
-            </a:fontRef>
-          </p:style>
-        </p:cxnSp>
-        <p:sp>
-          <p:nvSpPr>
-            <p:cNvPr id="7178" name="Rectangle 23">
-              <a:extLst>
-                <a:ext uri="{FF2B5EF4-FFF2-40B4-BE49-F238E27FC236}">
-                  <a16:creationId xmlns:a16="http://schemas.microsoft.com/office/drawing/2014/main" id="{887EA6D2-2883-42C2-993D-094CA6D65DA3}"/>
-                </a:ext>
-                <a:ext uri="{C183D7F6-B498-43B3-948B-1728B52AA6E4}">
-                  <adec:decorative xmlns:adec="http://schemas.microsoft.com/office/drawing/2017/decorative" val="1"/>
-                </a:ext>
-              </a:extLst>
-            </p:cNvPr>
-            <p:cNvSpPr/>
-            <p:nvPr>
-              <p:extLst>
-                <p:ext uri="{386F3935-93C4-4BCD-93E2-E3B085C9AB24}">
-                  <p16:designElem xmlns:p16="http://schemas.microsoft.com/office/powerpoint/2015/main" val="1"/>
-                </p:ext>
-              </p:extLst>
-            </p:nvPr>
-          </p:nvSpPr>
-          <p:spPr>
-            <a:xfrm>
-              <a:off x="9181476" y="-8467"/>
-              <a:ext cx="3007349" cy="6866467"/>
-            </a:xfrm>
-            <a:custGeom>
-              <a:avLst/>
-              <a:gdLst/>
-              <a:ahLst/>
-              <a:cxnLst/>
-              <a:rect l="l" t="t" r="r" b="b"/>
-              <a:pathLst>
-                <a:path w="3007349" h="6866467">
-                  <a:moveTo>
-                    <a:pt x="2045532" y="0"/>
-                  </a:moveTo>
-                  <a:lnTo>
-                    <a:pt x="3007349" y="0"/>
-                  </a:lnTo>
-                  <a:lnTo>
-                    <a:pt x="3007349" y="6866467"/>
-                  </a:lnTo>
-                  <a:lnTo>
-                    <a:pt x="0" y="6866467"/>
-                  </a:lnTo>
-                  <a:lnTo>
-                    <a:pt x="2045532" y="0"/>
-                  </a:lnTo>
-                  <a:close/>
-                </a:path>
-              </a:pathLst>
-            </a:custGeom>
-            <a:solidFill>
-              <a:schemeClr val="accent1">
-                <a:alpha val="30000"/>
-              </a:schemeClr>
-            </a:solidFill>
-            <a:ln>
-              <a:noFill/>
-            </a:ln>
-            <a:effectLst/>
-          </p:spPr>
-          <p:style>
-            <a:lnRef idx="1">
-              <a:schemeClr val="accent1"/>
-            </a:lnRef>
-            <a:fillRef idx="3">
-              <a:schemeClr val="accent1"/>
-            </a:fillRef>
-            <a:effectRef idx="2">
-              <a:schemeClr val="accent1"/>
-            </a:effectRef>
-            <a:fontRef idx="minor">
-              <a:schemeClr val="lt1"/>
-            </a:fontRef>
-          </p:style>
-          <p:txBody>
-            <a:bodyPr/>
-            <a:lstStyle/>
-            <a:p>
-              <a:endParaRPr lang="es-419"/>
-            </a:p>
-          </p:txBody>
-        </p:sp>
-        <p:sp>
-          <p:nvSpPr>
-            <p:cNvPr id="7179" name="Rectangle 25">
-              <a:extLst>
-                <a:ext uri="{FF2B5EF4-FFF2-40B4-BE49-F238E27FC236}">
-                  <a16:creationId xmlns:a16="http://schemas.microsoft.com/office/drawing/2014/main" id="{3B895046-636F-4D1B-ACA4-29AA0CB3329F}"/>
-                </a:ext>
-                <a:ext uri="{C183D7F6-B498-43B3-948B-1728B52AA6E4}">
-                  <adec:decorative xmlns:adec="http://schemas.microsoft.com/office/drawing/2017/decorative" val="1"/>
-                </a:ext>
-              </a:extLst>
-            </p:cNvPr>
-            <p:cNvSpPr/>
-            <p:nvPr>
-              <p:extLst>
-                <p:ext uri="{386F3935-93C4-4BCD-93E2-E3B085C9AB24}">
-                  <p16:designElem xmlns:p16="http://schemas.microsoft.com/office/powerpoint/2015/main" val="1"/>
-                </p:ext>
-              </p:extLst>
-            </p:nvPr>
-          </p:nvSpPr>
-          <p:spPr>
-            <a:xfrm>
-              <a:off x="9603442" y="-8467"/>
-              <a:ext cx="2588558" cy="6866467"/>
-            </a:xfrm>
-            <a:custGeom>
-              <a:avLst/>
-              <a:gdLst/>
-              <a:ahLst/>
-              <a:cxnLst/>
-              <a:rect l="l" t="t" r="r" b="b"/>
-              <a:pathLst>
-                <a:path w="2573311" h="6866467">
-                  <a:moveTo>
-                    <a:pt x="0" y="0"/>
-                  </a:moveTo>
-                  <a:lnTo>
-                    <a:pt x="2573311" y="0"/>
-                  </a:lnTo>
-                  <a:lnTo>
-                    <a:pt x="2573311" y="6866467"/>
-                  </a:lnTo>
-                  <a:lnTo>
-                    <a:pt x="1202336" y="6866467"/>
-                  </a:lnTo>
-                  <a:lnTo>
-                    <a:pt x="0" y="0"/>
-                  </a:lnTo>
-                  <a:close/>
-                </a:path>
-              </a:pathLst>
-            </a:custGeom>
-            <a:solidFill>
-              <a:schemeClr val="accent1">
-                <a:alpha val="20000"/>
-              </a:schemeClr>
-            </a:solidFill>
-            <a:ln>
-              <a:noFill/>
-            </a:ln>
-            <a:effectLst/>
-          </p:spPr>
-          <p:style>
-            <a:lnRef idx="1">
-              <a:schemeClr val="accent1"/>
-            </a:lnRef>
-            <a:fillRef idx="3">
-              <a:schemeClr val="accent1"/>
-            </a:fillRef>
-            <a:effectRef idx="2">
-              <a:schemeClr val="accent1"/>
-            </a:effectRef>
-            <a:fontRef idx="minor">
-              <a:schemeClr val="lt1"/>
-            </a:fontRef>
-          </p:style>
-          <p:txBody>
-            <a:bodyPr/>
-            <a:lstStyle/>
-            <a:p>
-              <a:endParaRPr lang="es-419"/>
-            </a:p>
-          </p:txBody>
-        </p:sp>
-        <p:sp>
-          <p:nvSpPr>
-            <p:cNvPr id="7180" name="Isosceles Triangle 7179">
-              <a:extLst>
-                <a:ext uri="{FF2B5EF4-FFF2-40B4-BE49-F238E27FC236}">
-                  <a16:creationId xmlns:a16="http://schemas.microsoft.com/office/drawing/2014/main" id="{C6B0CDE3-E054-4EDD-A43B-F96843D8BF51}"/>
-                </a:ext>
-                <a:ext uri="{C183D7F6-B498-43B3-948B-1728B52AA6E4}">
-                  <adec:decorative xmlns:adec="http://schemas.microsoft.com/office/drawing/2017/decorative" val="1"/>
-                </a:ext>
-              </a:extLst>
-            </p:cNvPr>
-            <p:cNvSpPr/>
-            <p:nvPr>
-              <p:extLst>
-                <p:ext uri="{386F3935-93C4-4BCD-93E2-E3B085C9AB24}">
-                  <p16:designElem xmlns:p16="http://schemas.microsoft.com/office/powerpoint/2015/main" val="1"/>
-                </p:ext>
-              </p:extLst>
-            </p:nvPr>
-          </p:nvSpPr>
-          <p:spPr>
-            <a:xfrm>
-              <a:off x="8932333" y="3048000"/>
-              <a:ext cx="3259667" cy="3810000"/>
-            </a:xfrm>
-            <a:prstGeom prst="triangle">
-              <a:avLst>
-                <a:gd name="adj" fmla="val 100000"/>
-              </a:avLst>
-            </a:prstGeom>
-            <a:solidFill>
-              <a:schemeClr val="accent2">
-                <a:alpha val="72000"/>
-              </a:schemeClr>
-            </a:solidFill>
-            <a:ln>
-              <a:noFill/>
-            </a:ln>
-            <a:effectLst/>
-          </p:spPr>
-          <p:style>
-            <a:lnRef idx="1">
-              <a:schemeClr val="accent1"/>
-            </a:lnRef>
-            <a:fillRef idx="3">
-              <a:schemeClr val="accent1"/>
-            </a:fillRef>
-            <a:effectRef idx="2">
-              <a:schemeClr val="accent1"/>
-            </a:effectRef>
-            <a:fontRef idx="minor">
-              <a:schemeClr val="lt1"/>
-            </a:fontRef>
-          </p:style>
-          <p:txBody>
-            <a:bodyPr/>
-            <a:lstStyle/>
-            <a:p>
-              <a:endParaRPr lang="es-419"/>
-            </a:p>
-          </p:txBody>
-        </p:sp>
-        <p:sp>
-          <p:nvSpPr>
-            <p:cNvPr id="7181" name="Rectangle 27">
-              <a:extLst>
-                <a:ext uri="{FF2B5EF4-FFF2-40B4-BE49-F238E27FC236}">
-                  <a16:creationId xmlns:a16="http://schemas.microsoft.com/office/drawing/2014/main" id="{3B66B1A2-F145-4C9B-85CC-4BF30D58CBC5}"/>
-                </a:ext>
-                <a:ext uri="{C183D7F6-B498-43B3-948B-1728B52AA6E4}">
-                  <adec:decorative xmlns:adec="http://schemas.microsoft.com/office/drawing/2017/decorative" val="1"/>
-                </a:ext>
-              </a:extLst>
-            </p:cNvPr>
-            <p:cNvSpPr/>
-            <p:nvPr>
-              <p:extLst>
-                <p:ext uri="{386F3935-93C4-4BCD-93E2-E3B085C9AB24}">
-                  <p16:designElem xmlns:p16="http://schemas.microsoft.com/office/powerpoint/2015/main" val="1"/>
-                </p:ext>
-              </p:extLst>
-            </p:nvPr>
-          </p:nvSpPr>
-          <p:spPr>
-            <a:xfrm>
-              <a:off x="9334500" y="-8467"/>
-              <a:ext cx="2854326" cy="6866467"/>
-            </a:xfrm>
-            <a:custGeom>
-              <a:avLst/>
-              <a:gdLst/>
-              <a:ahLst/>
-              <a:cxnLst/>
-              <a:rect l="l" t="t" r="r" b="b"/>
-              <a:pathLst>
-                <a:path w="2858013" h="6866467">
-                  <a:moveTo>
-                    <a:pt x="0" y="0"/>
-                  </a:moveTo>
-                  <a:lnTo>
-                    <a:pt x="2858013" y="0"/>
-                  </a:lnTo>
-                  <a:lnTo>
-                    <a:pt x="2858013" y="6866467"/>
-                  </a:lnTo>
-                  <a:lnTo>
-                    <a:pt x="2473942" y="6866467"/>
-                  </a:lnTo>
-                  <a:lnTo>
-                    <a:pt x="0" y="0"/>
-                  </a:lnTo>
-                  <a:close/>
-                </a:path>
-              </a:pathLst>
-            </a:custGeom>
-            <a:solidFill>
-              <a:schemeClr val="accent2">
-                <a:lumMod val="75000"/>
-                <a:alpha val="70000"/>
-              </a:schemeClr>
-            </a:solidFill>
-            <a:ln>
-              <a:noFill/>
-            </a:ln>
-            <a:effectLst/>
-          </p:spPr>
-          <p:style>
-            <a:lnRef idx="1">
-              <a:schemeClr val="accent1"/>
-            </a:lnRef>
-            <a:fillRef idx="3">
-              <a:schemeClr val="accent1"/>
-            </a:fillRef>
-            <a:effectRef idx="2">
-              <a:schemeClr val="accent1"/>
-            </a:effectRef>
-            <a:fontRef idx="minor">
-              <a:schemeClr val="lt1"/>
-            </a:fontRef>
-          </p:style>
-          <p:txBody>
-            <a:bodyPr/>
-            <a:lstStyle/>
-            <a:p>
-              <a:endParaRPr lang="es-419"/>
-            </a:p>
-          </p:txBody>
-        </p:sp>
-        <p:sp>
-          <p:nvSpPr>
-            <p:cNvPr id="7182" name="Rectangle 28">
-              <a:extLst>
-                <a:ext uri="{FF2B5EF4-FFF2-40B4-BE49-F238E27FC236}">
-                  <a16:creationId xmlns:a16="http://schemas.microsoft.com/office/drawing/2014/main" id="{5D4FC972-94B3-4035-8D31-E668C132B411}"/>
-                </a:ext>
-                <a:ext uri="{C183D7F6-B498-43B3-948B-1728B52AA6E4}">
-                  <adec:decorative xmlns:adec="http://schemas.microsoft.com/office/drawing/2017/decorative" val="1"/>
-                </a:ext>
-              </a:extLst>
-            </p:cNvPr>
-            <p:cNvSpPr/>
-            <p:nvPr>
-              <p:extLst>
-                <p:ext uri="{386F3935-93C4-4BCD-93E2-E3B085C9AB24}">
-                  <p16:designElem xmlns:p16="http://schemas.microsoft.com/office/powerpoint/2015/main" val="1"/>
-                </p:ext>
-              </p:extLst>
-            </p:nvPr>
-          </p:nvSpPr>
-          <p:spPr>
-            <a:xfrm>
-              <a:off x="10898730" y="-8467"/>
-              <a:ext cx="1290094" cy="6866467"/>
-            </a:xfrm>
-            <a:custGeom>
-              <a:avLst/>
-              <a:gdLst/>
-              <a:ahLst/>
-              <a:cxnLst/>
-              <a:rect l="l" t="t" r="r" b="b"/>
-              <a:pathLst>
-                <a:path w="1290094" h="6858000">
-                  <a:moveTo>
-                    <a:pt x="1019735" y="0"/>
-                  </a:moveTo>
-                  <a:lnTo>
-                    <a:pt x="1290094" y="0"/>
-                  </a:lnTo>
-                  <a:lnTo>
-                    <a:pt x="1290094" y="6858000"/>
-                  </a:lnTo>
-                  <a:lnTo>
-                    <a:pt x="0" y="6858000"/>
-                  </a:lnTo>
-                  <a:lnTo>
-                    <a:pt x="1019735" y="0"/>
-                  </a:lnTo>
-                  <a:close/>
-                </a:path>
-              </a:pathLst>
-            </a:custGeom>
-            <a:solidFill>
-              <a:schemeClr val="accent1">
-                <a:lumMod val="60000"/>
-                <a:lumOff val="40000"/>
-                <a:alpha val="70000"/>
-              </a:schemeClr>
-            </a:solidFill>
-            <a:ln>
-              <a:noFill/>
-            </a:ln>
-            <a:effectLst/>
-          </p:spPr>
-          <p:style>
-            <a:lnRef idx="1">
-              <a:schemeClr val="accent1"/>
-            </a:lnRef>
-            <a:fillRef idx="3">
-              <a:schemeClr val="accent1"/>
-            </a:fillRef>
-            <a:effectRef idx="2">
-              <a:schemeClr val="accent1"/>
-            </a:effectRef>
-            <a:fontRef idx="minor">
-              <a:schemeClr val="lt1"/>
-            </a:fontRef>
-          </p:style>
-          <p:txBody>
-            <a:bodyPr/>
-            <a:lstStyle/>
-            <a:p>
-              <a:endParaRPr lang="es-419"/>
-            </a:p>
-          </p:txBody>
-        </p:sp>
-        <p:sp>
-          <p:nvSpPr>
-            <p:cNvPr id="7183" name="Rectangle 29">
-              <a:extLst>
-                <a:ext uri="{FF2B5EF4-FFF2-40B4-BE49-F238E27FC236}">
-                  <a16:creationId xmlns:a16="http://schemas.microsoft.com/office/drawing/2014/main" id="{374B9941-AFBE-4A77-A50E-B6EA04A746AE}"/>
-                </a:ext>
-                <a:ext uri="{C183D7F6-B498-43B3-948B-1728B52AA6E4}">
-                  <adec:decorative xmlns:adec="http://schemas.microsoft.com/office/drawing/2017/decorative" val="1"/>
-                </a:ext>
-              </a:extLst>
-            </p:cNvPr>
-            <p:cNvSpPr/>
-            <p:nvPr>
-              <p:extLst>
-                <p:ext uri="{386F3935-93C4-4BCD-93E2-E3B085C9AB24}">
-                  <p16:designElem xmlns:p16="http://schemas.microsoft.com/office/powerpoint/2015/main" val="1"/>
-                </p:ext>
-              </p:extLst>
-            </p:nvPr>
-          </p:nvSpPr>
-          <p:spPr>
-            <a:xfrm>
-              <a:off x="10938999" y="-8467"/>
-              <a:ext cx="1249825" cy="6866467"/>
-            </a:xfrm>
-            <a:custGeom>
-              <a:avLst/>
-              <a:gdLst/>
-              <a:ahLst/>
-              <a:cxnLst/>
-              <a:rect l="l" t="t" r="r" b="b"/>
-              <a:pathLst>
-                <a:path w="1249825" h="6858000">
-                  <a:moveTo>
-                    <a:pt x="0" y="0"/>
-                  </a:moveTo>
-                  <a:lnTo>
-                    <a:pt x="1249825" y="0"/>
-                  </a:lnTo>
-                  <a:lnTo>
-                    <a:pt x="1249825" y="6858000"/>
-                  </a:lnTo>
-                  <a:lnTo>
-                    <a:pt x="1109382" y="6858000"/>
-                  </a:lnTo>
-                  <a:lnTo>
-                    <a:pt x="0" y="0"/>
-                  </a:lnTo>
-                  <a:close/>
-                </a:path>
-              </a:pathLst>
-            </a:custGeom>
-            <a:solidFill>
-              <a:schemeClr val="accent1">
-                <a:alpha val="65000"/>
-              </a:schemeClr>
-            </a:solidFill>
-            <a:ln>
-              <a:noFill/>
-            </a:ln>
-            <a:effectLst/>
-          </p:spPr>
-          <p:style>
-            <a:lnRef idx="1">
-              <a:schemeClr val="accent1"/>
-            </a:lnRef>
-            <a:fillRef idx="3">
-              <a:schemeClr val="accent1"/>
-            </a:fillRef>
-            <a:effectRef idx="2">
-              <a:schemeClr val="accent1"/>
-            </a:effectRef>
-            <a:fontRef idx="minor">
-              <a:schemeClr val="lt1"/>
-            </a:fontRef>
-          </p:style>
-          <p:txBody>
-            <a:bodyPr/>
-            <a:lstStyle/>
-            <a:p>
-              <a:endParaRPr lang="es-419"/>
-            </a:p>
-          </p:txBody>
-        </p:sp>
-        <p:sp>
-          <p:nvSpPr>
-            <p:cNvPr id="7184" name="Isosceles Triangle 7183">
-              <a:extLst>
-                <a:ext uri="{FF2B5EF4-FFF2-40B4-BE49-F238E27FC236}">
-                  <a16:creationId xmlns:a16="http://schemas.microsoft.com/office/drawing/2014/main" id="{27A982C5-2C38-4CE9-BC18-94697AD657FB}"/>
-                </a:ext>
-                <a:ext uri="{C183D7F6-B498-43B3-948B-1728B52AA6E4}">
-                  <adec:decorative xmlns:adec="http://schemas.microsoft.com/office/drawing/2017/decorative" val="1"/>
-                </a:ext>
-              </a:extLst>
-            </p:cNvPr>
-            <p:cNvSpPr/>
-            <p:nvPr>
-              <p:extLst>
-                <p:ext uri="{386F3935-93C4-4BCD-93E2-E3B085C9AB24}">
-                  <p16:designElem xmlns:p16="http://schemas.microsoft.com/office/powerpoint/2015/main" val="1"/>
-                </p:ext>
-              </p:extLst>
-            </p:nvPr>
-          </p:nvSpPr>
-          <p:spPr>
-            <a:xfrm>
-              <a:off x="10371666" y="3589867"/>
-              <a:ext cx="1817159" cy="3268133"/>
-            </a:xfrm>
-            <a:prstGeom prst="triangle">
-              <a:avLst>
-                <a:gd name="adj" fmla="val 100000"/>
-              </a:avLst>
-            </a:prstGeom>
-            <a:solidFill>
-              <a:schemeClr val="accent1">
-                <a:alpha val="80000"/>
-              </a:schemeClr>
-            </a:solidFill>
-            <a:ln>
-              <a:noFill/>
-            </a:ln>
-            <a:effectLst/>
-          </p:spPr>
-          <p:style>
-            <a:lnRef idx="1">
-              <a:schemeClr val="accent1"/>
-            </a:lnRef>
-            <a:fillRef idx="3">
-              <a:schemeClr val="accent1"/>
-            </a:fillRef>
-            <a:effectRef idx="2">
-              <a:schemeClr val="accent1"/>
-            </a:effectRef>
-            <a:fontRef idx="minor">
-              <a:schemeClr val="lt1"/>
-            </a:fontRef>
-          </p:style>
-          <p:txBody>
-            <a:bodyPr/>
-            <a:lstStyle/>
-            <a:p>
-              <a:endParaRPr lang="es-419"/>
-            </a:p>
-          </p:txBody>
-        </p:sp>
-        <p:sp>
-          <p:nvSpPr>
-            <p:cNvPr id="7185" name="Isosceles Triangle 7184">
-              <a:extLst>
-                <a:ext uri="{FF2B5EF4-FFF2-40B4-BE49-F238E27FC236}">
-                  <a16:creationId xmlns:a16="http://schemas.microsoft.com/office/drawing/2014/main" id="{0060D8D1-7BB1-498F-AFBB-ADAC130A9E90}"/>
-                </a:ext>
-                <a:ext uri="{C183D7F6-B498-43B3-948B-1728B52AA6E4}">
-                  <adec:decorative xmlns:adec="http://schemas.microsoft.com/office/drawing/2017/decorative" val="1"/>
-                </a:ext>
-              </a:extLst>
-            </p:cNvPr>
-            <p:cNvSpPr/>
-            <p:nvPr>
-              <p:extLst>
-                <p:ext uri="{386F3935-93C4-4BCD-93E2-E3B085C9AB24}">
-                  <p16:designElem xmlns:p16="http://schemas.microsoft.com/office/powerpoint/2015/main" val="1"/>
-                </p:ext>
-              </p:extLst>
-            </p:nvPr>
-          </p:nvSpPr>
-          <p:spPr>
-            <a:xfrm rot="10800000">
-              <a:off x="0" y="0"/>
-              <a:ext cx="842596" cy="5666154"/>
-            </a:xfrm>
-            <a:prstGeom prst="triangle">
-              <a:avLst>
-                <a:gd name="adj" fmla="val 100000"/>
-              </a:avLst>
-            </a:prstGeom>
-            <a:solidFill>
-              <a:schemeClr val="accent1">
-                <a:alpha val="85000"/>
-              </a:schemeClr>
-            </a:solidFill>
-            <a:ln>
-              <a:noFill/>
-            </a:ln>
-            <a:effectLst/>
-          </p:spPr>
-          <p:style>
-            <a:lnRef idx="1">
-              <a:schemeClr val="accent1"/>
-            </a:lnRef>
-            <a:fillRef idx="3">
-              <a:schemeClr val="accent1"/>
-            </a:fillRef>
-            <a:effectRef idx="2">
-              <a:schemeClr val="accent1"/>
-            </a:effectRef>
-            <a:fontRef idx="minor">
-              <a:schemeClr val="lt1"/>
-            </a:fontRef>
-          </p:style>
-          <p:txBody>
-            <a:bodyPr/>
-            <a:lstStyle/>
-            <a:p>
-              <a:endParaRPr lang="es-419"/>
-            </a:p>
-          </p:txBody>
-        </p:sp>
-      </p:grpSp>
-      <p:sp>
-        <p:nvSpPr>
-          <p:cNvPr id="2" name="Title 1"/>
           <p:cNvSpPr>
             <a:spLocks noGrp="1"/>
           </p:cNvSpPr>
@@ -8857,31 +8495,17 @@
         </p:nvSpPr>
         <p:spPr>
           <a:xfrm>
-            <a:off x="1095571" y="-23097"/>
-            <a:ext cx="5755351" cy="1087656"/>
+            <a:off x="1990341" y="305817"/>
+            <a:ext cx="3962401" cy="758742"/>
           </a:xfrm>
         </p:spPr>
         <p:txBody>
-          <a:bodyPr vert="horz" lIns="91440" tIns="45720" rIns="91440" bIns="45720" rtlCol="0" anchor="b">
-            <a:normAutofit/>
-          </a:bodyPr>
+          <a:bodyPr/>
           <a:lstStyle/>
           <a:p>
-            <a:pPr>
-              <a:lnSpc>
-                <a:spcPct val="90000"/>
-              </a:lnSpc>
-            </a:pPr>
-            <a:r>
-              <a:rPr lang="en-US" kern="1200" dirty="0">
-                <a:solidFill>
-                  <a:schemeClr val="accent1"/>
-                </a:solidFill>
-                <a:latin typeface="+mj-lt"/>
-                <a:ea typeface="+mj-ea"/>
-                <a:cs typeface="+mj-cs"/>
-              </a:rPr>
-              <a:t>Sprint Backlog y Casos de Uso</a:t>
+            <a:r>
+              <a:rPr lang="es-CL" b="1" dirty="0"/>
+              <a:t>Tabla de esfuerzo</a:t>
             </a:r>
           </a:p>
         </p:txBody>
@@ -8891,7 +8515,7 @@
           <p:cNvPr id="6" name="Imagen 5" descr="Icono&#10;&#10;El contenido generado por IA puede ser incorrecto.">
             <a:extLst>
               <a:ext uri="{FF2B5EF4-FFF2-40B4-BE49-F238E27FC236}">
-                <a16:creationId xmlns:a16="http://schemas.microsoft.com/office/drawing/2014/main" id="{7E82DFEA-5661-2971-A2D6-ADD2080ED4E6}"/>
+                <a16:creationId xmlns:a16="http://schemas.microsoft.com/office/drawing/2014/main" id="{0229C12C-E696-0EC6-D066-1A7E8B7079B2}"/>
               </a:ext>
             </a:extLst>
           </p:cNvPr>
@@ -8916,56 +8540,59 @@
           </a:prstGeom>
         </p:spPr>
       </p:pic>
-      <p:sp>
-        <p:nvSpPr>
-          <p:cNvPr id="7" name="CuadroTexto 6">
+      <p:pic>
+        <p:nvPicPr>
+          <p:cNvPr id="8" name="Picture 2" descr="Eugcom.cl">
             <a:extLst>
               <a:ext uri="{FF2B5EF4-FFF2-40B4-BE49-F238E27FC236}">
-                <a16:creationId xmlns:a16="http://schemas.microsoft.com/office/drawing/2014/main" id="{434D1221-90B6-ECD5-D382-44BD2760117E}"/>
+                <a16:creationId xmlns:a16="http://schemas.microsoft.com/office/drawing/2014/main" id="{78B1BC20-FDE9-0730-F35E-6528A34C3315}"/>
               </a:ext>
             </a:extLst>
           </p:cNvPr>
-          <p:cNvSpPr txBox="1"/>
+          <p:cNvPicPr>
+            <a:picLocks noChangeAspect="1" noChangeArrowheads="1"/>
+          </p:cNvPicPr>
           <p:nvPr/>
-        </p:nvSpPr>
-        <p:spPr>
+        </p:nvPicPr>
+        <p:blipFill>
+          <a:blip r:embed="rId3">
+            <a:extLst>
+              <a:ext uri="{28A0092B-C50C-407E-A947-70E740481C1C}">
+                <a14:useLocalDpi xmlns:a14="http://schemas.microsoft.com/office/drawing/2010/main" val="0"/>
+              </a:ext>
+            </a:extLst>
+          </a:blip>
+          <a:srcRect/>
+          <a:stretch>
+            <a:fillRect/>
+          </a:stretch>
+        </p:blipFill>
+        <p:spPr bwMode="auto">
           <a:xfrm>
-            <a:off x="7693921" y="1064559"/>
-            <a:ext cx="1360046" cy="615553"/>
+            <a:off x="102849" y="108353"/>
+            <a:ext cx="577448" cy="577448"/>
           </a:xfrm>
           <a:prstGeom prst="rect">
             <a:avLst/>
           </a:prstGeom>
           <a:noFill/>
+          <a:extLst>
+            <a:ext uri="{909E8E84-426E-40DD-AFC4-6F175D3DCCD1}">
+              <a14:hiddenFill xmlns:a14="http://schemas.microsoft.com/office/drawing/2010/main">
+                <a:solidFill>
+                  <a:srgbClr val="FFFFFF"/>
+                </a:solidFill>
+              </a14:hiddenFill>
+            </a:ext>
+          </a:extLst>
         </p:spPr>
-        <p:txBody>
-          <a:bodyPr wrap="square" rtlCol="0">
-            <a:spAutoFit/>
-          </a:bodyPr>
-          <a:lstStyle/>
-          <a:p>
-            <a:r>
-              <a:rPr lang="es-CL" sz="800" dirty="0"/>
-              <a:t>Facultad de ingeniería</a:t>
-            </a:r>
-          </a:p>
-          <a:p>
-            <a:r>
-              <a:rPr lang="es-CL" sz="800" dirty="0"/>
-              <a:t>Ingeniería de software I</a:t>
-            </a:r>
-          </a:p>
-          <a:p>
-            <a:endParaRPr lang="es-CL" dirty="0"/>
-          </a:p>
-        </p:txBody>
-      </p:sp>
+      </p:pic>
       <p:pic>
         <p:nvPicPr>
-          <p:cNvPr id="5" name="Imagen 4">
+          <p:cNvPr id="4" name="Imagen 3" descr="Aplicación&#10;&#10;El contenido generado por IA puede ser incorrecto.">
             <a:extLst>
               <a:ext uri="{FF2B5EF4-FFF2-40B4-BE49-F238E27FC236}">
-                <a16:creationId xmlns:a16="http://schemas.microsoft.com/office/drawing/2014/main" id="{BDEF45D2-F0CB-434B-AD77-CFD950FF1BA1}"/>
+                <a16:creationId xmlns:a16="http://schemas.microsoft.com/office/drawing/2014/main" id="{3BCE9E6C-580D-1CD6-49A1-E30CA3A1855A}"/>
               </a:ext>
             </a:extLst>
           </p:cNvPr>
@@ -8975,22 +8602,37 @@
           <p:nvPr/>
         </p:nvPicPr>
         <p:blipFill>
-          <a:blip r:embed="rId3"/>
+          <a:blip r:embed="rId4"/>
           <a:stretch>
             <a:fillRect/>
           </a:stretch>
         </p:blipFill>
         <p:spPr>
           <a:xfrm>
-            <a:off x="253553" y="1963860"/>
-            <a:ext cx="8206631" cy="2635034"/>
+            <a:off x="479237" y="2356285"/>
+            <a:ext cx="7950407" cy="1850095"/>
           </a:xfrm>
           <a:prstGeom prst="rect">
             <a:avLst/>
           </a:prstGeom>
+          <a:ln>
+            <a:noFill/>
+          </a:ln>
+          <a:effectLst>
+            <a:outerShdw blurRad="292100" dist="139700" dir="2700000" algn="tl" rotWithShape="0">
+              <a:srgbClr val="333333">
+                <a:alpha val="65000"/>
+              </a:srgbClr>
+            </a:outerShdw>
+          </a:effectLst>
         </p:spPr>
       </p:pic>
     </p:spTree>
+    <p:extLst>
+      <p:ext uri="{BB962C8B-B14F-4D97-AF65-F5344CB8AC3E}">
+        <p14:creationId xmlns:p14="http://schemas.microsoft.com/office/powerpoint/2010/main" val="2393607889"/>
+      </p:ext>
+    </p:extLst>
   </p:cSld>
   <p:clrMapOvr>
     <a:masterClrMapping/>
@@ -9154,7 +8796,7 @@
         </p:nvSpPr>
         <p:spPr>
           <a:xfrm>
-            <a:off x="609599" y="3297936"/>
+            <a:off x="1398143" y="2904744"/>
             <a:ext cx="6347714" cy="1320800"/>
           </a:xfrm>
         </p:spPr>
@@ -9163,18 +8805,18 @@
           <a:lstStyle/>
           <a:p>
             <a:r>
-              <a:rPr lang="en-US" dirty="0"/>
+              <a:rPr lang="en-US" b="1" dirty="0"/>
               <a:t>A Continuaci</a:t>
             </a:r>
             <a:r>
-              <a:rPr lang="es-CL" dirty="0"/>
+              <a:rPr lang="es-CL" b="1" dirty="0"/>
               <a:t>ó</a:t>
             </a:r>
             <a:r>
-              <a:rPr lang="en-US" dirty="0"/>
+              <a:rPr lang="en-US" b="1" dirty="0"/>
               <a:t>n una Demo…</a:t>
             </a:r>
-            <a:endParaRPr lang="es-419" dirty="0"/>
+            <a:endParaRPr lang="es-419" b="1" dirty="0"/>
           </a:p>
         </p:txBody>
       </p:sp>
